--- a/14. Tendências Futuras, Perguntas e Fechamento_Todos/AI_Plant_Breeding_Fechamento_2026_PT_FIT796.pptx
+++ b/14. Tendências Futuras, Perguntas e Fechamento_Todos/AI_Plant_Breeding_Fechamento_2026_PT_FIT796.pptx
@@ -152,1900 +152,15 @@
 </p:presentation>
 </file>
 
-<file path=ppt/revisionInfo.xml><?xml version="1.0" encoding="utf-8"?>
-<p1510:revInfo xmlns:a="http://schemas.openxmlformats.org/drawingml/2006/main" xmlns:r="http://schemas.openxmlformats.org/officeDocument/2006/relationships" xmlns:p1510="http://schemas.microsoft.com/office/powerpoint/2015/10/main">
-  <p1510:revLst>
-    <p1510:client id="{E45A2DEC-2261-48AF-B4A8-7B10B1CC645D}" v="1" dt="2026-10-27T15:45:50.880"/>
-  </p1510:revLst>
-</p1510:revInfo>
-</file>
-
 <file path=ppt/changesInfos/changesInfo1.xml><?xml version="1.0" encoding="utf-8"?>
 <pc:chgInfo xmlns:a="http://schemas.openxmlformats.org/drawingml/2006/main" xmlns:r="http://schemas.openxmlformats.org/officeDocument/2006/relationships" xmlns:ac="http://schemas.microsoft.com/office/drawing/2013/main/command" xmlns:pc="http://schemas.microsoft.com/office/powerpoint/2013/main/command">
   <pc:docChgLst>
     <pc:chgData name="Eder Silva" userId="9b7f41b4-798d-40cf-8f87-8e33ae7a0417" providerId="ADAL" clId="{DFF9E84E-5922-4F26-9EAD-8AB4E668133E}"/>
     <pc:docChg chg="undo custSel addSld delSld modSld sldOrd modMainMaster">
-      <pc:chgData name="Eder Silva" userId="9b7f41b4-798d-40cf-8f87-8e33ae7a0417" providerId="ADAL" clId="{DFF9E84E-5922-4F26-9EAD-8AB4E668133E}" dt="2026-10-27T20:31:56.322" v="1876" actId="1076"/>
+      <pc:chgData name="Eder Silva" userId="9b7f41b4-798d-40cf-8f87-8e33ae7a0417" providerId="ADAL" clId="{DFF9E84E-5922-4F26-9EAD-8AB4E668133E}" dt="2026-10-30T20:29:33.176" v="1877" actId="1076"/>
       <pc:docMkLst>
         <pc:docMk/>
       </pc:docMkLst>
-      <pc:sldChg chg="del">
-        <pc:chgData name="Eder Silva" userId="9b7f41b4-798d-40cf-8f87-8e33ae7a0417" providerId="ADAL" clId="{DFF9E84E-5922-4F26-9EAD-8AB4E668133E}" dt="2026-10-27T14:38:00.065" v="477" actId="2696"/>
-        <pc:sldMkLst>
-          <pc:docMk/>
-          <pc:sldMk cId="0" sldId="256"/>
-        </pc:sldMkLst>
-      </pc:sldChg>
-      <pc:sldChg chg="del">
-        <pc:chgData name="Eder Silva" userId="9b7f41b4-798d-40cf-8f87-8e33ae7a0417" providerId="ADAL" clId="{DFF9E84E-5922-4F26-9EAD-8AB4E668133E}" dt="2026-10-27T14:38:00.067" v="478" actId="2696"/>
-        <pc:sldMkLst>
-          <pc:docMk/>
-          <pc:sldMk cId="0" sldId="257"/>
-        </pc:sldMkLst>
-      </pc:sldChg>
-      <pc:sldChg chg="del">
-        <pc:chgData name="Eder Silva" userId="9b7f41b4-798d-40cf-8f87-8e33ae7a0417" providerId="ADAL" clId="{DFF9E84E-5922-4F26-9EAD-8AB4E668133E}" dt="2026-10-27T14:38:00.070" v="479" actId="2696"/>
-        <pc:sldMkLst>
-          <pc:docMk/>
-          <pc:sldMk cId="0" sldId="258"/>
-        </pc:sldMkLst>
-      </pc:sldChg>
-      <pc:sldChg chg="del">
-        <pc:chgData name="Eder Silva" userId="9b7f41b4-798d-40cf-8f87-8e33ae7a0417" providerId="ADAL" clId="{DFF9E84E-5922-4F26-9EAD-8AB4E668133E}" dt="2026-10-27T14:38:00.073" v="480" actId="2696"/>
-        <pc:sldMkLst>
-          <pc:docMk/>
-          <pc:sldMk cId="0" sldId="259"/>
-        </pc:sldMkLst>
-      </pc:sldChg>
-      <pc:sldChg chg="del">
-        <pc:chgData name="Eder Silva" userId="9b7f41b4-798d-40cf-8f87-8e33ae7a0417" providerId="ADAL" clId="{DFF9E84E-5922-4F26-9EAD-8AB4E668133E}" dt="2026-10-27T14:38:00.074" v="481" actId="2696"/>
-        <pc:sldMkLst>
-          <pc:docMk/>
-          <pc:sldMk cId="0" sldId="260"/>
-        </pc:sldMkLst>
-      </pc:sldChg>
-      <pc:sldChg chg="del">
-        <pc:chgData name="Eder Silva" userId="9b7f41b4-798d-40cf-8f87-8e33ae7a0417" providerId="ADAL" clId="{DFF9E84E-5922-4F26-9EAD-8AB4E668133E}" dt="2026-10-27T14:38:00.076" v="482" actId="2696"/>
-        <pc:sldMkLst>
-          <pc:docMk/>
-          <pc:sldMk cId="0" sldId="261"/>
-        </pc:sldMkLst>
-      </pc:sldChg>
-      <pc:sldChg chg="del">
-        <pc:chgData name="Eder Silva" userId="9b7f41b4-798d-40cf-8f87-8e33ae7a0417" providerId="ADAL" clId="{DFF9E84E-5922-4F26-9EAD-8AB4E668133E}" dt="2026-10-27T14:38:00.079" v="483" actId="2696"/>
-        <pc:sldMkLst>
-          <pc:docMk/>
-          <pc:sldMk cId="0" sldId="262"/>
-        </pc:sldMkLst>
-      </pc:sldChg>
-      <pc:sldChg chg="del">
-        <pc:chgData name="Eder Silva" userId="9b7f41b4-798d-40cf-8f87-8e33ae7a0417" providerId="ADAL" clId="{DFF9E84E-5922-4F26-9EAD-8AB4E668133E}" dt="2026-10-27T14:38:00.081" v="484" actId="2696"/>
-        <pc:sldMkLst>
-          <pc:docMk/>
-          <pc:sldMk cId="0" sldId="263"/>
-        </pc:sldMkLst>
-      </pc:sldChg>
-      <pc:sldChg chg="del">
-        <pc:chgData name="Eder Silva" userId="9b7f41b4-798d-40cf-8f87-8e33ae7a0417" providerId="ADAL" clId="{DFF9E84E-5922-4F26-9EAD-8AB4E668133E}" dt="2026-10-27T14:38:00.084" v="485" actId="2696"/>
-        <pc:sldMkLst>
-          <pc:docMk/>
-          <pc:sldMk cId="0" sldId="264"/>
-        </pc:sldMkLst>
-      </pc:sldChg>
-      <pc:sldChg chg="del">
-        <pc:chgData name="Eder Silva" userId="9b7f41b4-798d-40cf-8f87-8e33ae7a0417" providerId="ADAL" clId="{DFF9E84E-5922-4F26-9EAD-8AB4E668133E}" dt="2026-10-27T14:38:00.086" v="486" actId="2696"/>
-        <pc:sldMkLst>
-          <pc:docMk/>
-          <pc:sldMk cId="0" sldId="265"/>
-        </pc:sldMkLst>
-      </pc:sldChg>
-      <pc:sldChg chg="del">
-        <pc:chgData name="Eder Silva" userId="9b7f41b4-798d-40cf-8f87-8e33ae7a0417" providerId="ADAL" clId="{DFF9E84E-5922-4F26-9EAD-8AB4E668133E}" dt="2026-10-27T14:38:00.088" v="487" actId="2696"/>
-        <pc:sldMkLst>
-          <pc:docMk/>
-          <pc:sldMk cId="0" sldId="266"/>
-        </pc:sldMkLst>
-      </pc:sldChg>
-      <pc:sldChg chg="del">
-        <pc:chgData name="Eder Silva" userId="9b7f41b4-798d-40cf-8f87-8e33ae7a0417" providerId="ADAL" clId="{DFF9E84E-5922-4F26-9EAD-8AB4E668133E}" dt="2026-10-27T14:38:00.091" v="488" actId="2696"/>
-        <pc:sldMkLst>
-          <pc:docMk/>
-          <pc:sldMk cId="0" sldId="267"/>
-        </pc:sldMkLst>
-      </pc:sldChg>
-      <pc:sldChg chg="del">
-        <pc:chgData name="Eder Silva" userId="9b7f41b4-798d-40cf-8f87-8e33ae7a0417" providerId="ADAL" clId="{DFF9E84E-5922-4F26-9EAD-8AB4E668133E}" dt="2026-10-27T14:38:00.093" v="489" actId="2696"/>
-        <pc:sldMkLst>
-          <pc:docMk/>
-          <pc:sldMk cId="0" sldId="268"/>
-        </pc:sldMkLst>
-      </pc:sldChg>
-      <pc:sldChg chg="del">
-        <pc:chgData name="Eder Silva" userId="9b7f41b4-798d-40cf-8f87-8e33ae7a0417" providerId="ADAL" clId="{DFF9E84E-5922-4F26-9EAD-8AB4E668133E}" dt="2026-10-27T14:38:00.095" v="490" actId="2696"/>
-        <pc:sldMkLst>
-          <pc:docMk/>
-          <pc:sldMk cId="0" sldId="269"/>
-        </pc:sldMkLst>
-      </pc:sldChg>
-      <pc:sldChg chg="del">
-        <pc:chgData name="Eder Silva" userId="9b7f41b4-798d-40cf-8f87-8e33ae7a0417" providerId="ADAL" clId="{DFF9E84E-5922-4F26-9EAD-8AB4E668133E}" dt="2026-10-27T14:38:00.097" v="491" actId="2696"/>
-        <pc:sldMkLst>
-          <pc:docMk/>
-          <pc:sldMk cId="0" sldId="270"/>
-        </pc:sldMkLst>
-      </pc:sldChg>
-      <pc:sldChg chg="del">
-        <pc:chgData name="Eder Silva" userId="9b7f41b4-798d-40cf-8f87-8e33ae7a0417" providerId="ADAL" clId="{DFF9E84E-5922-4F26-9EAD-8AB4E668133E}" dt="2026-10-27T14:38:00.099" v="492" actId="2696"/>
-        <pc:sldMkLst>
-          <pc:docMk/>
-          <pc:sldMk cId="0" sldId="271"/>
-        </pc:sldMkLst>
-      </pc:sldChg>
-      <pc:sldChg chg="del">
-        <pc:chgData name="Eder Silva" userId="9b7f41b4-798d-40cf-8f87-8e33ae7a0417" providerId="ADAL" clId="{DFF9E84E-5922-4F26-9EAD-8AB4E668133E}" dt="2026-10-27T14:38:00.101" v="493" actId="2696"/>
-        <pc:sldMkLst>
-          <pc:docMk/>
-          <pc:sldMk cId="0" sldId="272"/>
-        </pc:sldMkLst>
-      </pc:sldChg>
-      <pc:sldChg chg="del">
-        <pc:chgData name="Eder Silva" userId="9b7f41b4-798d-40cf-8f87-8e33ae7a0417" providerId="ADAL" clId="{DFF9E84E-5922-4F26-9EAD-8AB4E668133E}" dt="2026-10-27T14:38:00.103" v="494" actId="2696"/>
-        <pc:sldMkLst>
-          <pc:docMk/>
-          <pc:sldMk cId="0" sldId="273"/>
-        </pc:sldMkLst>
-      </pc:sldChg>
-      <pc:sldChg chg="del">
-        <pc:chgData name="Eder Silva" userId="9b7f41b4-798d-40cf-8f87-8e33ae7a0417" providerId="ADAL" clId="{DFF9E84E-5922-4F26-9EAD-8AB4E668133E}" dt="2026-10-27T14:38:00.105" v="495" actId="2696"/>
-        <pc:sldMkLst>
-          <pc:docMk/>
-          <pc:sldMk cId="0" sldId="274"/>
-        </pc:sldMkLst>
-      </pc:sldChg>
-      <pc:sldChg chg="del">
-        <pc:chgData name="Eder Silva" userId="9b7f41b4-798d-40cf-8f87-8e33ae7a0417" providerId="ADAL" clId="{DFF9E84E-5922-4F26-9EAD-8AB4E668133E}" dt="2026-10-27T14:38:00.107" v="496" actId="2696"/>
-        <pc:sldMkLst>
-          <pc:docMk/>
-          <pc:sldMk cId="0" sldId="275"/>
-        </pc:sldMkLst>
-      </pc:sldChg>
-      <pc:sldChg chg="del">
-        <pc:chgData name="Eder Silva" userId="9b7f41b4-798d-40cf-8f87-8e33ae7a0417" providerId="ADAL" clId="{DFF9E84E-5922-4F26-9EAD-8AB4E668133E}" dt="2026-10-27T14:38:00.109" v="497" actId="2696"/>
-        <pc:sldMkLst>
-          <pc:docMk/>
-          <pc:sldMk cId="0" sldId="276"/>
-        </pc:sldMkLst>
-      </pc:sldChg>
-      <pc:sldChg chg="del">
-        <pc:chgData name="Eder Silva" userId="9b7f41b4-798d-40cf-8f87-8e33ae7a0417" providerId="ADAL" clId="{DFF9E84E-5922-4F26-9EAD-8AB4E668133E}" dt="2026-10-27T14:38:00.112" v="498" actId="2696"/>
-        <pc:sldMkLst>
-          <pc:docMk/>
-          <pc:sldMk cId="0" sldId="277"/>
-        </pc:sldMkLst>
-      </pc:sldChg>
-      <pc:sldChg chg="del">
-        <pc:chgData name="Eder Silva" userId="9b7f41b4-798d-40cf-8f87-8e33ae7a0417" providerId="ADAL" clId="{DFF9E84E-5922-4F26-9EAD-8AB4E668133E}" dt="2026-10-27T14:38:00.114" v="499" actId="2696"/>
-        <pc:sldMkLst>
-          <pc:docMk/>
-          <pc:sldMk cId="0" sldId="278"/>
-        </pc:sldMkLst>
-      </pc:sldChg>
-      <pc:sldChg chg="del">
-        <pc:chgData name="Eder Silva" userId="9b7f41b4-798d-40cf-8f87-8e33ae7a0417" providerId="ADAL" clId="{DFF9E84E-5922-4F26-9EAD-8AB4E668133E}" dt="2026-10-27T14:38:00.116" v="500" actId="2696"/>
-        <pc:sldMkLst>
-          <pc:docMk/>
-          <pc:sldMk cId="0" sldId="279"/>
-        </pc:sldMkLst>
-      </pc:sldChg>
-      <pc:sldChg chg="del">
-        <pc:chgData name="Eder Silva" userId="9b7f41b4-798d-40cf-8f87-8e33ae7a0417" providerId="ADAL" clId="{DFF9E84E-5922-4F26-9EAD-8AB4E668133E}" dt="2026-10-27T14:38:00.118" v="501" actId="2696"/>
-        <pc:sldMkLst>
-          <pc:docMk/>
-          <pc:sldMk cId="0" sldId="280"/>
-        </pc:sldMkLst>
-      </pc:sldChg>
-      <pc:sldChg chg="del">
-        <pc:chgData name="Eder Silva" userId="9b7f41b4-798d-40cf-8f87-8e33ae7a0417" providerId="ADAL" clId="{DFF9E84E-5922-4F26-9EAD-8AB4E668133E}" dt="2026-10-27T14:38:00.120" v="502" actId="2696"/>
-        <pc:sldMkLst>
-          <pc:docMk/>
-          <pc:sldMk cId="0" sldId="281"/>
-        </pc:sldMkLst>
-      </pc:sldChg>
-      <pc:sldChg chg="del">
-        <pc:chgData name="Eder Silva" userId="9b7f41b4-798d-40cf-8f87-8e33ae7a0417" providerId="ADAL" clId="{DFF9E84E-5922-4F26-9EAD-8AB4E668133E}" dt="2026-10-27T14:38:00.122" v="503" actId="2696"/>
-        <pc:sldMkLst>
-          <pc:docMk/>
-          <pc:sldMk cId="0" sldId="282"/>
-        </pc:sldMkLst>
-      </pc:sldChg>
-      <pc:sldChg chg="del">
-        <pc:chgData name="Eder Silva" userId="9b7f41b4-798d-40cf-8f87-8e33ae7a0417" providerId="ADAL" clId="{DFF9E84E-5922-4F26-9EAD-8AB4E668133E}" dt="2026-10-27T14:38:00.124" v="504" actId="2696"/>
-        <pc:sldMkLst>
-          <pc:docMk/>
-          <pc:sldMk cId="0" sldId="283"/>
-        </pc:sldMkLst>
-      </pc:sldChg>
-      <pc:sldChg chg="del">
-        <pc:chgData name="Eder Silva" userId="9b7f41b4-798d-40cf-8f87-8e33ae7a0417" providerId="ADAL" clId="{DFF9E84E-5922-4F26-9EAD-8AB4E668133E}" dt="2026-10-27T14:38:00.127" v="505" actId="2696"/>
-        <pc:sldMkLst>
-          <pc:docMk/>
-          <pc:sldMk cId="0" sldId="284"/>
-        </pc:sldMkLst>
-      </pc:sldChg>
-      <pc:sldChg chg="del">
-        <pc:chgData name="Eder Silva" userId="9b7f41b4-798d-40cf-8f87-8e33ae7a0417" providerId="ADAL" clId="{DFF9E84E-5922-4F26-9EAD-8AB4E668133E}" dt="2026-10-27T14:38:00.130" v="506" actId="2696"/>
-        <pc:sldMkLst>
-          <pc:docMk/>
-          <pc:sldMk cId="0" sldId="285"/>
-        </pc:sldMkLst>
-      </pc:sldChg>
-      <pc:sldChg chg="del">
-        <pc:chgData name="Eder Silva" userId="9b7f41b4-798d-40cf-8f87-8e33ae7a0417" providerId="ADAL" clId="{DFF9E84E-5922-4F26-9EAD-8AB4E668133E}" dt="2026-10-27T14:38:00.133" v="507" actId="2696"/>
-        <pc:sldMkLst>
-          <pc:docMk/>
-          <pc:sldMk cId="0" sldId="286"/>
-        </pc:sldMkLst>
-      </pc:sldChg>
-      <pc:sldChg chg="del">
-        <pc:chgData name="Eder Silva" userId="9b7f41b4-798d-40cf-8f87-8e33ae7a0417" providerId="ADAL" clId="{DFF9E84E-5922-4F26-9EAD-8AB4E668133E}" dt="2026-10-27T14:38:00.135" v="508" actId="2696"/>
-        <pc:sldMkLst>
-          <pc:docMk/>
-          <pc:sldMk cId="0" sldId="287"/>
-        </pc:sldMkLst>
-      </pc:sldChg>
-      <pc:sldChg chg="del">
-        <pc:chgData name="Eder Silva" userId="9b7f41b4-798d-40cf-8f87-8e33ae7a0417" providerId="ADAL" clId="{DFF9E84E-5922-4F26-9EAD-8AB4E668133E}" dt="2026-10-27T14:38:00.136" v="509" actId="2696"/>
-        <pc:sldMkLst>
-          <pc:docMk/>
-          <pc:sldMk cId="0" sldId="288"/>
-        </pc:sldMkLst>
-      </pc:sldChg>
-      <pc:sldChg chg="del">
-        <pc:chgData name="Eder Silva" userId="9b7f41b4-798d-40cf-8f87-8e33ae7a0417" providerId="ADAL" clId="{DFF9E84E-5922-4F26-9EAD-8AB4E668133E}" dt="2026-10-27T14:38:00.138" v="510" actId="2696"/>
-        <pc:sldMkLst>
-          <pc:docMk/>
-          <pc:sldMk cId="0" sldId="289"/>
-        </pc:sldMkLst>
-      </pc:sldChg>
-      <pc:sldChg chg="del">
-        <pc:chgData name="Eder Silva" userId="9b7f41b4-798d-40cf-8f87-8e33ae7a0417" providerId="ADAL" clId="{DFF9E84E-5922-4F26-9EAD-8AB4E668133E}" dt="2026-10-27T14:38:00.139" v="511" actId="2696"/>
-        <pc:sldMkLst>
-          <pc:docMk/>
-          <pc:sldMk cId="0" sldId="290"/>
-        </pc:sldMkLst>
-      </pc:sldChg>
-      <pc:sldChg chg="del">
-        <pc:chgData name="Eder Silva" userId="9b7f41b4-798d-40cf-8f87-8e33ae7a0417" providerId="ADAL" clId="{DFF9E84E-5922-4F26-9EAD-8AB4E668133E}" dt="2026-10-27T14:38:00.141" v="512" actId="2696"/>
-        <pc:sldMkLst>
-          <pc:docMk/>
-          <pc:sldMk cId="0" sldId="291"/>
-        </pc:sldMkLst>
-      </pc:sldChg>
-      <pc:sldChg chg="del">
-        <pc:chgData name="Eder Silva" userId="9b7f41b4-798d-40cf-8f87-8e33ae7a0417" providerId="ADAL" clId="{DFF9E84E-5922-4F26-9EAD-8AB4E668133E}" dt="2026-10-27T14:38:00.142" v="513" actId="2696"/>
-        <pc:sldMkLst>
-          <pc:docMk/>
-          <pc:sldMk cId="0" sldId="292"/>
-        </pc:sldMkLst>
-      </pc:sldChg>
-      <pc:sldChg chg="del">
-        <pc:chgData name="Eder Silva" userId="9b7f41b4-798d-40cf-8f87-8e33ae7a0417" providerId="ADAL" clId="{DFF9E84E-5922-4F26-9EAD-8AB4E668133E}" dt="2026-10-27T14:38:00.145" v="514" actId="2696"/>
-        <pc:sldMkLst>
-          <pc:docMk/>
-          <pc:sldMk cId="0" sldId="293"/>
-        </pc:sldMkLst>
-      </pc:sldChg>
-      <pc:sldChg chg="del">
-        <pc:chgData name="Eder Silva" userId="9b7f41b4-798d-40cf-8f87-8e33ae7a0417" providerId="ADAL" clId="{DFF9E84E-5922-4F26-9EAD-8AB4E668133E}" dt="2026-10-27T14:38:00.147" v="515" actId="2696"/>
-        <pc:sldMkLst>
-          <pc:docMk/>
-          <pc:sldMk cId="0" sldId="294"/>
-        </pc:sldMkLst>
-      </pc:sldChg>
-      <pc:sldChg chg="del">
-        <pc:chgData name="Eder Silva" userId="9b7f41b4-798d-40cf-8f87-8e33ae7a0417" providerId="ADAL" clId="{DFF9E84E-5922-4F26-9EAD-8AB4E668133E}" dt="2026-10-27T14:38:00.150" v="516" actId="2696"/>
-        <pc:sldMkLst>
-          <pc:docMk/>
-          <pc:sldMk cId="0" sldId="295"/>
-        </pc:sldMkLst>
-      </pc:sldChg>
-      <pc:sldChg chg="modSp add del mod ord modNotes">
-        <pc:chgData name="Eder Silva" userId="9b7f41b4-798d-40cf-8f87-8e33ae7a0417" providerId="ADAL" clId="{DFF9E84E-5922-4F26-9EAD-8AB4E668133E}" dt="2026-10-27T20:24:35.806" v="1736" actId="2696"/>
-        <pc:sldMkLst>
-          <pc:docMk/>
-          <pc:sldMk cId="2185262198" sldId="296"/>
-        </pc:sldMkLst>
-        <pc:spChg chg="mod">
-          <ac:chgData name="Eder Silva" userId="9b7f41b4-798d-40cf-8f87-8e33ae7a0417" providerId="ADAL" clId="{DFF9E84E-5922-4F26-9EAD-8AB4E668133E}" dt="2026-10-27T14:37:52.762" v="3" actId="20577"/>
-          <ac:spMkLst>
-            <pc:docMk/>
-            <pc:sldMk cId="2185262198" sldId="296"/>
-            <ac:spMk id="3" creationId="{00000000-0000-0000-0000-000000000000}"/>
-          </ac:spMkLst>
-        </pc:spChg>
-        <pc:spChg chg="mod">
-          <ac:chgData name="Eder Silva" userId="9b7f41b4-798d-40cf-8f87-8e33ae7a0417" providerId="ADAL" clId="{DFF9E84E-5922-4F26-9EAD-8AB4E668133E}" dt="2026-10-27T14:37:52.780" v="4" actId="20577"/>
-          <ac:spMkLst>
-            <pc:docMk/>
-            <pc:sldMk cId="2185262198" sldId="296"/>
-            <ac:spMk id="4" creationId="{00000000-0000-0000-0000-000000000000}"/>
-          </ac:spMkLst>
-        </pc:spChg>
-        <pc:spChg chg="mod">
-          <ac:chgData name="Eder Silva" userId="9b7f41b4-798d-40cf-8f87-8e33ae7a0417" providerId="ADAL" clId="{DFF9E84E-5922-4F26-9EAD-8AB4E668133E}" dt="2026-10-27T14:37:52.786" v="5" actId="20577"/>
-          <ac:spMkLst>
-            <pc:docMk/>
-            <pc:sldMk cId="2185262198" sldId="296"/>
-            <ac:spMk id="5" creationId="{00000000-0000-0000-0000-000000000000}"/>
-          </ac:spMkLst>
-        </pc:spChg>
-        <pc:spChg chg="mod">
-          <ac:chgData name="Eder Silva" userId="9b7f41b4-798d-40cf-8f87-8e33ae7a0417" providerId="ADAL" clId="{DFF9E84E-5922-4F26-9EAD-8AB4E668133E}" dt="2026-10-27T14:37:52.792" v="6" actId="20577"/>
-          <ac:spMkLst>
-            <pc:docMk/>
-            <pc:sldMk cId="2185262198" sldId="296"/>
-            <ac:spMk id="6" creationId="{00000000-0000-0000-0000-000000000000}"/>
-          </ac:spMkLst>
-        </pc:spChg>
-      </pc:sldChg>
-      <pc:sldChg chg="modSp add del mod ord modNotes">
-        <pc:chgData name="Eder Silva" userId="9b7f41b4-798d-40cf-8f87-8e33ae7a0417" providerId="ADAL" clId="{DFF9E84E-5922-4F26-9EAD-8AB4E668133E}" dt="2026-10-27T20:24:35.804" v="1735" actId="2696"/>
-        <pc:sldMkLst>
-          <pc:docMk/>
-          <pc:sldMk cId="69750769" sldId="297"/>
-        </pc:sldMkLst>
-        <pc:spChg chg="mod">
-          <ac:chgData name="Eder Silva" userId="9b7f41b4-798d-40cf-8f87-8e33ae7a0417" providerId="ADAL" clId="{DFF9E84E-5922-4F26-9EAD-8AB4E668133E}" dt="2026-10-27T14:37:52.868" v="11" actId="20577"/>
-          <ac:spMkLst>
-            <pc:docMk/>
-            <pc:sldMk cId="69750769" sldId="297"/>
-            <ac:spMk id="3" creationId="{00000000-0000-0000-0000-000000000000}"/>
-          </ac:spMkLst>
-        </pc:spChg>
-        <pc:spChg chg="mod">
-          <ac:chgData name="Eder Silva" userId="9b7f41b4-798d-40cf-8f87-8e33ae7a0417" providerId="ADAL" clId="{DFF9E84E-5922-4F26-9EAD-8AB4E668133E}" dt="2026-10-27T14:37:53.127" v="16" actId="947"/>
-          <ac:spMkLst>
-            <pc:docMk/>
-            <pc:sldMk cId="69750769" sldId="297"/>
-            <ac:spMk id="5" creationId="{00000000-0000-0000-0000-000000000000}"/>
-          </ac:spMkLst>
-        </pc:spChg>
-        <pc:spChg chg="mod">
-          <ac:chgData name="Eder Silva" userId="9b7f41b4-798d-40cf-8f87-8e33ae7a0417" providerId="ADAL" clId="{DFF9E84E-5922-4F26-9EAD-8AB4E668133E}" dt="2026-10-27T14:37:53.132" v="17" actId="947"/>
-          <ac:spMkLst>
-            <pc:docMk/>
-            <pc:sldMk cId="69750769" sldId="297"/>
-            <ac:spMk id="7" creationId="{00000000-0000-0000-0000-000000000000}"/>
-          </ac:spMkLst>
-        </pc:spChg>
-        <pc:spChg chg="mod">
-          <ac:chgData name="Eder Silva" userId="9b7f41b4-798d-40cf-8f87-8e33ae7a0417" providerId="ADAL" clId="{DFF9E84E-5922-4F26-9EAD-8AB4E668133E}" dt="2026-10-27T14:37:53.136" v="18" actId="947"/>
-          <ac:spMkLst>
-            <pc:docMk/>
-            <pc:sldMk cId="69750769" sldId="297"/>
-            <ac:spMk id="9" creationId="{00000000-0000-0000-0000-000000000000}"/>
-          </ac:spMkLst>
-        </pc:spChg>
-        <pc:spChg chg="mod">
-          <ac:chgData name="Eder Silva" userId="9b7f41b4-798d-40cf-8f87-8e33ae7a0417" providerId="ADAL" clId="{DFF9E84E-5922-4F26-9EAD-8AB4E668133E}" dt="2026-10-27T14:37:53.141" v="19" actId="947"/>
-          <ac:spMkLst>
-            <pc:docMk/>
-            <pc:sldMk cId="69750769" sldId="297"/>
-            <ac:spMk id="11" creationId="{00000000-0000-0000-0000-000000000000}"/>
-          </ac:spMkLst>
-        </pc:spChg>
-        <pc:spChg chg="mod">
-          <ac:chgData name="Eder Silva" userId="9b7f41b4-798d-40cf-8f87-8e33ae7a0417" providerId="ADAL" clId="{DFF9E84E-5922-4F26-9EAD-8AB4E668133E}" dt="2026-10-27T14:37:53.146" v="20" actId="20577"/>
-          <ac:spMkLst>
-            <pc:docMk/>
-            <pc:sldMk cId="69750769" sldId="297"/>
-            <ac:spMk id="12" creationId="{00000000-0000-0000-0000-000000000000}"/>
-          </ac:spMkLst>
-        </pc:spChg>
-      </pc:sldChg>
-      <pc:sldChg chg="addSp delSp modSp add del mod ord modNotes">
-        <pc:chgData name="Eder Silva" userId="9b7f41b4-798d-40cf-8f87-8e33ae7a0417" providerId="ADAL" clId="{DFF9E84E-5922-4F26-9EAD-8AB4E668133E}" dt="2026-10-27T20:24:35.802" v="1734" actId="2696"/>
-        <pc:sldMkLst>
-          <pc:docMk/>
-          <pc:sldMk cId="2210706809" sldId="298"/>
-        </pc:sldMkLst>
-        <pc:spChg chg="mod">
-          <ac:chgData name="Eder Silva" userId="9b7f41b4-798d-40cf-8f87-8e33ae7a0417" providerId="ADAL" clId="{DFF9E84E-5922-4F26-9EAD-8AB4E668133E}" dt="2026-10-27T14:37:53.179" v="25" actId="20577"/>
-          <ac:spMkLst>
-            <pc:docMk/>
-            <pc:sldMk cId="2210706809" sldId="298"/>
-            <ac:spMk id="3" creationId="{00000000-0000-0000-0000-000000000000}"/>
-          </ac:spMkLst>
-        </pc:spChg>
-        <pc:spChg chg="mod">
-          <ac:chgData name="Eder Silva" userId="9b7f41b4-798d-40cf-8f87-8e33ae7a0417" providerId="ADAL" clId="{DFF9E84E-5922-4F26-9EAD-8AB4E668133E}" dt="2026-10-27T14:37:53.187" v="26" actId="20577"/>
-          <ac:spMkLst>
-            <pc:docMk/>
-            <pc:sldMk cId="2210706809" sldId="298"/>
-            <ac:spMk id="4" creationId="{00000000-0000-0000-0000-000000000000}"/>
-          </ac:spMkLst>
-        </pc:spChg>
-        <pc:spChg chg="mod">
-          <ac:chgData name="Eder Silva" userId="9b7f41b4-798d-40cf-8f87-8e33ae7a0417" providerId="ADAL" clId="{DFF9E84E-5922-4F26-9EAD-8AB4E668133E}" dt="2026-10-27T14:37:53.192" v="27" actId="20577"/>
-          <ac:spMkLst>
-            <pc:docMk/>
-            <pc:sldMk cId="2210706809" sldId="298"/>
-            <ac:spMk id="6" creationId="{00000000-0000-0000-0000-000000000000}"/>
-          </ac:spMkLst>
-        </pc:spChg>
-        <pc:spChg chg="add mod">
-          <ac:chgData name="Eder Silva" userId="9b7f41b4-798d-40cf-8f87-8e33ae7a0417" providerId="ADAL" clId="{DFF9E84E-5922-4F26-9EAD-8AB4E668133E}" dt="2026-10-27T14:37:53.351" v="52"/>
-          <ac:spMkLst>
-            <pc:docMk/>
-            <pc:sldMk cId="2210706809" sldId="298"/>
-            <ac:spMk id="7" creationId="{DC43B917-13C3-4075-0098-2C951DDD71FE}"/>
-          </ac:spMkLst>
-        </pc:spChg>
-        <pc:spChg chg="add mod">
-          <ac:chgData name="Eder Silva" userId="9b7f41b4-798d-40cf-8f87-8e33ae7a0417" providerId="ADAL" clId="{DFF9E84E-5922-4F26-9EAD-8AB4E668133E}" dt="2026-10-27T14:37:53.386" v="75"/>
-          <ac:spMkLst>
-            <pc:docMk/>
-            <pc:sldMk cId="2210706809" sldId="298"/>
-            <ac:spMk id="8" creationId="{398F9146-C40C-C244-F672-F7C415B2CFFE}"/>
-          </ac:spMkLst>
-        </pc:spChg>
-        <pc:spChg chg="add mod">
-          <ac:chgData name="Eder Silva" userId="9b7f41b4-798d-40cf-8f87-8e33ae7a0417" providerId="ADAL" clId="{DFF9E84E-5922-4F26-9EAD-8AB4E668133E}" dt="2026-10-27T14:37:53.423" v="98"/>
-          <ac:spMkLst>
-            <pc:docMk/>
-            <pc:sldMk cId="2210706809" sldId="298"/>
-            <ac:spMk id="9" creationId="{DBE90778-7912-613E-E9C3-322C8338582E}"/>
-          </ac:spMkLst>
-        </pc:spChg>
-        <pc:spChg chg="add mod">
-          <ac:chgData name="Eder Silva" userId="9b7f41b4-798d-40cf-8f87-8e33ae7a0417" providerId="ADAL" clId="{DFF9E84E-5922-4F26-9EAD-8AB4E668133E}" dt="2026-10-27T14:37:53.457" v="121"/>
-          <ac:spMkLst>
-            <pc:docMk/>
-            <pc:sldMk cId="2210706809" sldId="298"/>
-            <ac:spMk id="10" creationId="{59721242-DBF5-54A8-C686-DA1692B8A034}"/>
-          </ac:spMkLst>
-        </pc:spChg>
-        <pc:picChg chg="del">
-          <ac:chgData name="Eder Silva" userId="9b7f41b4-798d-40cf-8f87-8e33ae7a0417" providerId="ADAL" clId="{DFF9E84E-5922-4F26-9EAD-8AB4E668133E}" dt="2026-10-27T14:37:53.202" v="29"/>
-          <ac:picMkLst>
-            <pc:docMk/>
-            <pc:sldMk cId="2210706809" sldId="298"/>
-            <ac:picMk id="5" creationId="{00000000-0000-0000-0000-000000000000}"/>
-          </ac:picMkLst>
-        </pc:picChg>
-      </pc:sldChg>
-      <pc:sldChg chg="modSp add del mod ord modNotes">
-        <pc:chgData name="Eder Silva" userId="9b7f41b4-798d-40cf-8f87-8e33ae7a0417" providerId="ADAL" clId="{DFF9E84E-5922-4F26-9EAD-8AB4E668133E}" dt="2026-10-27T20:24:35.798" v="1733" actId="2696"/>
-        <pc:sldMkLst>
-          <pc:docMk/>
-          <pc:sldMk cId="4041692779" sldId="299"/>
-        </pc:sldMkLst>
-        <pc:spChg chg="mod">
-          <ac:chgData name="Eder Silva" userId="9b7f41b4-798d-40cf-8f87-8e33ae7a0417" providerId="ADAL" clId="{DFF9E84E-5922-4F26-9EAD-8AB4E668133E}" dt="2026-10-27T14:37:53.494" v="126" actId="20577"/>
-          <ac:spMkLst>
-            <pc:docMk/>
-            <pc:sldMk cId="4041692779" sldId="299"/>
-            <ac:spMk id="3" creationId="{00000000-0000-0000-0000-000000000000}"/>
-          </ac:spMkLst>
-        </pc:spChg>
-        <pc:spChg chg="mod">
-          <ac:chgData name="Eder Silva" userId="9b7f41b4-798d-40cf-8f87-8e33ae7a0417" providerId="ADAL" clId="{DFF9E84E-5922-4F26-9EAD-8AB4E668133E}" dt="2026-10-27T14:37:53.770" v="131" actId="947"/>
-          <ac:spMkLst>
-            <pc:docMk/>
-            <pc:sldMk cId="4041692779" sldId="299"/>
-            <ac:spMk id="5" creationId="{00000000-0000-0000-0000-000000000000}"/>
-          </ac:spMkLst>
-        </pc:spChg>
-        <pc:spChg chg="mod">
-          <ac:chgData name="Eder Silva" userId="9b7f41b4-798d-40cf-8f87-8e33ae7a0417" providerId="ADAL" clId="{DFF9E84E-5922-4F26-9EAD-8AB4E668133E}" dt="2026-10-27T14:37:53.777" v="132" actId="947"/>
-          <ac:spMkLst>
-            <pc:docMk/>
-            <pc:sldMk cId="4041692779" sldId="299"/>
-            <ac:spMk id="7" creationId="{00000000-0000-0000-0000-000000000000}"/>
-          </ac:spMkLst>
-        </pc:spChg>
-        <pc:spChg chg="mod">
-          <ac:chgData name="Eder Silva" userId="9b7f41b4-798d-40cf-8f87-8e33ae7a0417" providerId="ADAL" clId="{DFF9E84E-5922-4F26-9EAD-8AB4E668133E}" dt="2026-10-27T14:37:53.783" v="133" actId="947"/>
-          <ac:spMkLst>
-            <pc:docMk/>
-            <pc:sldMk cId="4041692779" sldId="299"/>
-            <ac:spMk id="9" creationId="{00000000-0000-0000-0000-000000000000}"/>
-          </ac:spMkLst>
-        </pc:spChg>
-        <pc:spChg chg="mod">
-          <ac:chgData name="Eder Silva" userId="9b7f41b4-798d-40cf-8f87-8e33ae7a0417" providerId="ADAL" clId="{DFF9E84E-5922-4F26-9EAD-8AB4E668133E}" dt="2026-10-27T14:37:53.790" v="134" actId="947"/>
-          <ac:spMkLst>
-            <pc:docMk/>
-            <pc:sldMk cId="4041692779" sldId="299"/>
-            <ac:spMk id="11" creationId="{00000000-0000-0000-0000-000000000000}"/>
-          </ac:spMkLst>
-        </pc:spChg>
-        <pc:spChg chg="mod">
-          <ac:chgData name="Eder Silva" userId="9b7f41b4-798d-40cf-8f87-8e33ae7a0417" providerId="ADAL" clId="{DFF9E84E-5922-4F26-9EAD-8AB4E668133E}" dt="2026-10-27T15:51:20.534" v="572" actId="947"/>
-          <ac:spMkLst>
-            <pc:docMk/>
-            <pc:sldMk cId="4041692779" sldId="299"/>
-            <ac:spMk id="12" creationId="{00000000-0000-0000-0000-000000000000}"/>
-          </ac:spMkLst>
-        </pc:spChg>
-      </pc:sldChg>
-      <pc:sldChg chg="modSp add del mod ord modNotes">
-        <pc:chgData name="Eder Silva" userId="9b7f41b4-798d-40cf-8f87-8e33ae7a0417" providerId="ADAL" clId="{DFF9E84E-5922-4F26-9EAD-8AB4E668133E}" dt="2026-10-27T20:24:35.796" v="1732" actId="2696"/>
-        <pc:sldMkLst>
-          <pc:docMk/>
-          <pc:sldMk cId="3779419563" sldId="300"/>
-        </pc:sldMkLst>
-        <pc:spChg chg="mod">
-          <ac:chgData name="Eder Silva" userId="9b7f41b4-798d-40cf-8f87-8e33ae7a0417" providerId="ADAL" clId="{DFF9E84E-5922-4F26-9EAD-8AB4E668133E}" dt="2026-10-27T14:37:53.866" v="140" actId="20577"/>
-          <ac:spMkLst>
-            <pc:docMk/>
-            <pc:sldMk cId="3779419563" sldId="300"/>
-            <ac:spMk id="3" creationId="{00000000-0000-0000-0000-000000000000}"/>
-          </ac:spMkLst>
-        </pc:spChg>
-        <pc:spChg chg="mod">
-          <ac:chgData name="Eder Silva" userId="9b7f41b4-798d-40cf-8f87-8e33ae7a0417" providerId="ADAL" clId="{DFF9E84E-5922-4F26-9EAD-8AB4E668133E}" dt="2026-10-27T14:37:53.877" v="141" actId="20577"/>
-          <ac:spMkLst>
-            <pc:docMk/>
-            <pc:sldMk cId="3779419563" sldId="300"/>
-            <ac:spMk id="4" creationId="{00000000-0000-0000-0000-000000000000}"/>
-          </ac:spMkLst>
-        </pc:spChg>
-        <pc:spChg chg="mod">
-          <ac:chgData name="Eder Silva" userId="9b7f41b4-798d-40cf-8f87-8e33ae7a0417" providerId="ADAL" clId="{DFF9E84E-5922-4F26-9EAD-8AB4E668133E}" dt="2026-10-27T15:51:20.689" v="596" actId="947"/>
-          <ac:spMkLst>
-            <pc:docMk/>
-            <pc:sldMk cId="3779419563" sldId="300"/>
-            <ac:spMk id="6" creationId="{00000000-0000-0000-0000-000000000000}"/>
-          </ac:spMkLst>
-        </pc:spChg>
-      </pc:sldChg>
-      <pc:sldChg chg="modSp add del mod ord modNotes">
-        <pc:chgData name="Eder Silva" userId="9b7f41b4-798d-40cf-8f87-8e33ae7a0417" providerId="ADAL" clId="{DFF9E84E-5922-4F26-9EAD-8AB4E668133E}" dt="2026-10-27T20:24:35.793" v="1731" actId="2696"/>
-        <pc:sldMkLst>
-          <pc:docMk/>
-          <pc:sldMk cId="2987219755" sldId="301"/>
-        </pc:sldMkLst>
-        <pc:spChg chg="mod">
-          <ac:chgData name="Eder Silva" userId="9b7f41b4-798d-40cf-8f87-8e33ae7a0417" providerId="ADAL" clId="{DFF9E84E-5922-4F26-9EAD-8AB4E668133E}" dt="2026-10-27T14:37:53.927" v="147" actId="20577"/>
-          <ac:spMkLst>
-            <pc:docMk/>
-            <pc:sldMk cId="2987219755" sldId="301"/>
-            <ac:spMk id="2" creationId="{00000000-0000-0000-0000-000000000000}"/>
-          </ac:spMkLst>
-        </pc:spChg>
-        <pc:spChg chg="mod">
-          <ac:chgData name="Eder Silva" userId="9b7f41b4-798d-40cf-8f87-8e33ae7a0417" providerId="ADAL" clId="{DFF9E84E-5922-4F26-9EAD-8AB4E668133E}" dt="2026-10-27T14:37:53.936" v="148" actId="20577"/>
-          <ac:spMkLst>
-            <pc:docMk/>
-            <pc:sldMk cId="2987219755" sldId="301"/>
-            <ac:spMk id="3" creationId="{00000000-0000-0000-0000-000000000000}"/>
-          </ac:spMkLst>
-        </pc:spChg>
-      </pc:sldChg>
-      <pc:sldChg chg="modSp add del mod ord modNotes">
-        <pc:chgData name="Eder Silva" userId="9b7f41b4-798d-40cf-8f87-8e33ae7a0417" providerId="ADAL" clId="{DFF9E84E-5922-4F26-9EAD-8AB4E668133E}" dt="2026-10-27T20:24:35.790" v="1730" actId="2696"/>
-        <pc:sldMkLst>
-          <pc:docMk/>
-          <pc:sldMk cId="1984427054" sldId="302"/>
-        </pc:sldMkLst>
-        <pc:spChg chg="mod">
-          <ac:chgData name="Eder Silva" userId="9b7f41b4-798d-40cf-8f87-8e33ae7a0417" providerId="ADAL" clId="{DFF9E84E-5922-4F26-9EAD-8AB4E668133E}" dt="2026-10-27T14:37:53.978" v="153" actId="20577"/>
-          <ac:spMkLst>
-            <pc:docMk/>
-            <pc:sldMk cId="1984427054" sldId="302"/>
-            <ac:spMk id="3" creationId="{00000000-0000-0000-0000-000000000000}"/>
-          </ac:spMkLst>
-        </pc:spChg>
-        <pc:spChg chg="mod">
-          <ac:chgData name="Eder Silva" userId="9b7f41b4-798d-40cf-8f87-8e33ae7a0417" providerId="ADAL" clId="{DFF9E84E-5922-4F26-9EAD-8AB4E668133E}" dt="2026-10-27T14:37:53.988" v="154" actId="20577"/>
-          <ac:spMkLst>
-            <pc:docMk/>
-            <pc:sldMk cId="1984427054" sldId="302"/>
-            <ac:spMk id="4" creationId="{00000000-0000-0000-0000-000000000000}"/>
-          </ac:spMkLst>
-        </pc:spChg>
-        <pc:spChg chg="mod">
-          <ac:chgData name="Eder Silva" userId="9b7f41b4-798d-40cf-8f87-8e33ae7a0417" providerId="ADAL" clId="{DFF9E84E-5922-4F26-9EAD-8AB4E668133E}" dt="2026-10-27T15:51:20.746" v="604" actId="947"/>
-          <ac:spMkLst>
-            <pc:docMk/>
-            <pc:sldMk cId="1984427054" sldId="302"/>
-            <ac:spMk id="6" creationId="{00000000-0000-0000-0000-000000000000}"/>
-          </ac:spMkLst>
-        </pc:spChg>
-      </pc:sldChg>
-      <pc:sldChg chg="modSp add del mod ord modNotes">
-        <pc:chgData name="Eder Silva" userId="9b7f41b4-798d-40cf-8f87-8e33ae7a0417" providerId="ADAL" clId="{DFF9E84E-5922-4F26-9EAD-8AB4E668133E}" dt="2026-10-27T20:24:35.787" v="1729" actId="2696"/>
-        <pc:sldMkLst>
-          <pc:docMk/>
-          <pc:sldMk cId="952120453" sldId="303"/>
-        </pc:sldMkLst>
-        <pc:spChg chg="mod">
-          <ac:chgData name="Eder Silva" userId="9b7f41b4-798d-40cf-8f87-8e33ae7a0417" providerId="ADAL" clId="{DFF9E84E-5922-4F26-9EAD-8AB4E668133E}" dt="2026-10-27T14:37:54.043" v="160" actId="20577"/>
-          <ac:spMkLst>
-            <pc:docMk/>
-            <pc:sldMk cId="952120453" sldId="303"/>
-            <ac:spMk id="3" creationId="{00000000-0000-0000-0000-000000000000}"/>
-          </ac:spMkLst>
-        </pc:spChg>
-        <pc:spChg chg="mod">
-          <ac:chgData name="Eder Silva" userId="9b7f41b4-798d-40cf-8f87-8e33ae7a0417" providerId="ADAL" clId="{DFF9E84E-5922-4F26-9EAD-8AB4E668133E}" dt="2026-10-27T14:37:54.053" v="161" actId="20577"/>
-          <ac:spMkLst>
-            <pc:docMk/>
-            <pc:sldMk cId="952120453" sldId="303"/>
-            <ac:spMk id="4" creationId="{00000000-0000-0000-0000-000000000000}"/>
-          </ac:spMkLst>
-        </pc:spChg>
-        <pc:spChg chg="mod">
-          <ac:chgData name="Eder Silva" userId="9b7f41b4-798d-40cf-8f87-8e33ae7a0417" providerId="ADAL" clId="{DFF9E84E-5922-4F26-9EAD-8AB4E668133E}" dt="2026-10-27T15:51:20.825" v="616" actId="947"/>
-          <ac:spMkLst>
-            <pc:docMk/>
-            <pc:sldMk cId="952120453" sldId="303"/>
-            <ac:spMk id="6" creationId="{00000000-0000-0000-0000-000000000000}"/>
-          </ac:spMkLst>
-        </pc:spChg>
-      </pc:sldChg>
-      <pc:sldChg chg="modSp add del mod ord modNotes">
-        <pc:chgData name="Eder Silva" userId="9b7f41b4-798d-40cf-8f87-8e33ae7a0417" providerId="ADAL" clId="{DFF9E84E-5922-4F26-9EAD-8AB4E668133E}" dt="2026-10-27T20:24:35.784" v="1728" actId="2696"/>
-        <pc:sldMkLst>
-          <pc:docMk/>
-          <pc:sldMk cId="871732000" sldId="304"/>
-        </pc:sldMkLst>
-        <pc:spChg chg="mod">
-          <ac:chgData name="Eder Silva" userId="9b7f41b4-798d-40cf-8f87-8e33ae7a0417" providerId="ADAL" clId="{DFF9E84E-5922-4F26-9EAD-8AB4E668133E}" dt="2026-10-27T14:37:54.128" v="167" actId="20577"/>
-          <ac:spMkLst>
-            <pc:docMk/>
-            <pc:sldMk cId="871732000" sldId="304"/>
-            <ac:spMk id="3" creationId="{00000000-0000-0000-0000-000000000000}"/>
-          </ac:spMkLst>
-        </pc:spChg>
-        <pc:spChg chg="mod">
-          <ac:chgData name="Eder Silva" userId="9b7f41b4-798d-40cf-8f87-8e33ae7a0417" providerId="ADAL" clId="{DFF9E84E-5922-4F26-9EAD-8AB4E668133E}" dt="2026-10-27T14:37:54.520" v="172" actId="947"/>
-          <ac:spMkLst>
-            <pc:docMk/>
-            <pc:sldMk cId="871732000" sldId="304"/>
-            <ac:spMk id="5" creationId="{00000000-0000-0000-0000-000000000000}"/>
-          </ac:spMkLst>
-        </pc:spChg>
-        <pc:spChg chg="mod">
-          <ac:chgData name="Eder Silva" userId="9b7f41b4-798d-40cf-8f87-8e33ae7a0417" providerId="ADAL" clId="{DFF9E84E-5922-4F26-9EAD-8AB4E668133E}" dt="2026-10-27T14:37:54.525" v="173" actId="947"/>
-          <ac:spMkLst>
-            <pc:docMk/>
-            <pc:sldMk cId="871732000" sldId="304"/>
-            <ac:spMk id="7" creationId="{00000000-0000-0000-0000-000000000000}"/>
-          </ac:spMkLst>
-        </pc:spChg>
-        <pc:spChg chg="mod">
-          <ac:chgData name="Eder Silva" userId="9b7f41b4-798d-40cf-8f87-8e33ae7a0417" providerId="ADAL" clId="{DFF9E84E-5922-4F26-9EAD-8AB4E668133E}" dt="2026-10-27T14:37:54.535" v="174" actId="947"/>
-          <ac:spMkLst>
-            <pc:docMk/>
-            <pc:sldMk cId="871732000" sldId="304"/>
-            <ac:spMk id="9" creationId="{00000000-0000-0000-0000-000000000000}"/>
-          </ac:spMkLst>
-        </pc:spChg>
-        <pc:spChg chg="mod">
-          <ac:chgData name="Eder Silva" userId="9b7f41b4-798d-40cf-8f87-8e33ae7a0417" providerId="ADAL" clId="{DFF9E84E-5922-4F26-9EAD-8AB4E668133E}" dt="2026-10-27T14:37:54.543" v="175" actId="947"/>
-          <ac:spMkLst>
-            <pc:docMk/>
-            <pc:sldMk cId="871732000" sldId="304"/>
-            <ac:spMk id="11" creationId="{00000000-0000-0000-0000-000000000000}"/>
-          </ac:spMkLst>
-        </pc:spChg>
-        <pc:spChg chg="mod">
-          <ac:chgData name="Eder Silva" userId="9b7f41b4-798d-40cf-8f87-8e33ae7a0417" providerId="ADAL" clId="{DFF9E84E-5922-4F26-9EAD-8AB4E668133E}" dt="2026-10-27T15:51:20.909" v="628" actId="947"/>
-          <ac:spMkLst>
-            <pc:docMk/>
-            <pc:sldMk cId="871732000" sldId="304"/>
-            <ac:spMk id="12" creationId="{00000000-0000-0000-0000-000000000000}"/>
-          </ac:spMkLst>
-        </pc:spChg>
-      </pc:sldChg>
-      <pc:sldChg chg="modSp add del mod ord modNotes">
-        <pc:chgData name="Eder Silva" userId="9b7f41b4-798d-40cf-8f87-8e33ae7a0417" providerId="ADAL" clId="{DFF9E84E-5922-4F26-9EAD-8AB4E668133E}" dt="2026-10-27T20:24:35.782" v="1727" actId="2696"/>
-        <pc:sldMkLst>
-          <pc:docMk/>
-          <pc:sldMk cId="862812270" sldId="305"/>
-        </pc:sldMkLst>
-        <pc:spChg chg="mod">
-          <ac:chgData name="Eder Silva" userId="9b7f41b4-798d-40cf-8f87-8e33ae7a0417" providerId="ADAL" clId="{DFF9E84E-5922-4F26-9EAD-8AB4E668133E}" dt="2026-10-27T15:41:23.582" v="517" actId="20577"/>
-          <ac:spMkLst>
-            <pc:docMk/>
-            <pc:sldMk cId="862812270" sldId="305"/>
-            <ac:spMk id="2" creationId="{00000000-0000-0000-0000-000000000000}"/>
-          </ac:spMkLst>
-        </pc:spChg>
-        <pc:spChg chg="mod">
-          <ac:chgData name="Eder Silva" userId="9b7f41b4-798d-40cf-8f87-8e33ae7a0417" providerId="ADAL" clId="{DFF9E84E-5922-4F26-9EAD-8AB4E668133E}" dt="2026-10-27T14:37:54.598" v="182" actId="20577"/>
-          <ac:spMkLst>
-            <pc:docMk/>
-            <pc:sldMk cId="862812270" sldId="305"/>
-            <ac:spMk id="3" creationId="{00000000-0000-0000-0000-000000000000}"/>
-          </ac:spMkLst>
-        </pc:spChg>
-      </pc:sldChg>
-      <pc:sldChg chg="modSp add del mod ord modNotes">
-        <pc:chgData name="Eder Silva" userId="9b7f41b4-798d-40cf-8f87-8e33ae7a0417" providerId="ADAL" clId="{DFF9E84E-5922-4F26-9EAD-8AB4E668133E}" dt="2026-10-27T20:24:35.778" v="1726" actId="2696"/>
-        <pc:sldMkLst>
-          <pc:docMk/>
-          <pc:sldMk cId="4106440121" sldId="306"/>
-        </pc:sldMkLst>
-        <pc:spChg chg="mod">
-          <ac:chgData name="Eder Silva" userId="9b7f41b4-798d-40cf-8f87-8e33ae7a0417" providerId="ADAL" clId="{DFF9E84E-5922-4F26-9EAD-8AB4E668133E}" dt="2026-10-27T14:37:54.646" v="187" actId="20577"/>
-          <ac:spMkLst>
-            <pc:docMk/>
-            <pc:sldMk cId="4106440121" sldId="306"/>
-            <ac:spMk id="3" creationId="{00000000-0000-0000-0000-000000000000}"/>
-          </ac:spMkLst>
-        </pc:spChg>
-        <pc:spChg chg="mod">
-          <ac:chgData name="Eder Silva" userId="9b7f41b4-798d-40cf-8f87-8e33ae7a0417" providerId="ADAL" clId="{DFF9E84E-5922-4F26-9EAD-8AB4E668133E}" dt="2026-10-27T14:37:54.914" v="192" actId="947"/>
-          <ac:spMkLst>
-            <pc:docMk/>
-            <pc:sldMk cId="4106440121" sldId="306"/>
-            <ac:spMk id="5" creationId="{00000000-0000-0000-0000-000000000000}"/>
-          </ac:spMkLst>
-        </pc:spChg>
-        <pc:spChg chg="mod">
-          <ac:chgData name="Eder Silva" userId="9b7f41b4-798d-40cf-8f87-8e33ae7a0417" providerId="ADAL" clId="{DFF9E84E-5922-4F26-9EAD-8AB4E668133E}" dt="2026-10-27T14:37:54.919" v="193" actId="947"/>
-          <ac:spMkLst>
-            <pc:docMk/>
-            <pc:sldMk cId="4106440121" sldId="306"/>
-            <ac:spMk id="7" creationId="{00000000-0000-0000-0000-000000000000}"/>
-          </ac:spMkLst>
-        </pc:spChg>
-        <pc:spChg chg="mod">
-          <ac:chgData name="Eder Silva" userId="9b7f41b4-798d-40cf-8f87-8e33ae7a0417" providerId="ADAL" clId="{DFF9E84E-5922-4F26-9EAD-8AB4E668133E}" dt="2026-10-27T14:37:54.924" v="194" actId="947"/>
-          <ac:spMkLst>
-            <pc:docMk/>
-            <pc:sldMk cId="4106440121" sldId="306"/>
-            <ac:spMk id="9" creationId="{00000000-0000-0000-0000-000000000000}"/>
-          </ac:spMkLst>
-        </pc:spChg>
-        <pc:spChg chg="mod">
-          <ac:chgData name="Eder Silva" userId="9b7f41b4-798d-40cf-8f87-8e33ae7a0417" providerId="ADAL" clId="{DFF9E84E-5922-4F26-9EAD-8AB4E668133E}" dt="2026-10-27T14:37:54.929" v="195" actId="947"/>
-          <ac:spMkLst>
-            <pc:docMk/>
-            <pc:sldMk cId="4106440121" sldId="306"/>
-            <ac:spMk id="11" creationId="{00000000-0000-0000-0000-000000000000}"/>
-          </ac:spMkLst>
-        </pc:spChg>
-        <pc:spChg chg="mod">
-          <ac:chgData name="Eder Silva" userId="9b7f41b4-798d-40cf-8f87-8e33ae7a0417" providerId="ADAL" clId="{DFF9E84E-5922-4F26-9EAD-8AB4E668133E}" dt="2026-10-27T15:51:21.019" v="644" actId="947"/>
-          <ac:spMkLst>
-            <pc:docMk/>
-            <pc:sldMk cId="4106440121" sldId="306"/>
-            <ac:spMk id="12" creationId="{00000000-0000-0000-0000-000000000000}"/>
-          </ac:spMkLst>
-        </pc:spChg>
-      </pc:sldChg>
-      <pc:sldChg chg="modSp add del mod ord modNotes">
-        <pc:chgData name="Eder Silva" userId="9b7f41b4-798d-40cf-8f87-8e33ae7a0417" providerId="ADAL" clId="{DFF9E84E-5922-4F26-9EAD-8AB4E668133E}" dt="2026-10-27T20:24:35.775" v="1725" actId="2696"/>
-        <pc:sldMkLst>
-          <pc:docMk/>
-          <pc:sldMk cId="2773046875" sldId="307"/>
-        </pc:sldMkLst>
-        <pc:spChg chg="mod">
-          <ac:chgData name="Eder Silva" userId="9b7f41b4-798d-40cf-8f87-8e33ae7a0417" providerId="ADAL" clId="{DFF9E84E-5922-4F26-9EAD-8AB4E668133E}" dt="2026-10-27T14:37:54.974" v="201" actId="20577"/>
-          <ac:spMkLst>
-            <pc:docMk/>
-            <pc:sldMk cId="2773046875" sldId="307"/>
-            <ac:spMk id="3" creationId="{00000000-0000-0000-0000-000000000000}"/>
-          </ac:spMkLst>
-        </pc:spChg>
-        <pc:spChg chg="mod">
-          <ac:chgData name="Eder Silva" userId="9b7f41b4-798d-40cf-8f87-8e33ae7a0417" providerId="ADAL" clId="{DFF9E84E-5922-4F26-9EAD-8AB4E668133E}" dt="2026-10-27T14:37:55.183" v="206" actId="947"/>
-          <ac:spMkLst>
-            <pc:docMk/>
-            <pc:sldMk cId="2773046875" sldId="307"/>
-            <ac:spMk id="5" creationId="{00000000-0000-0000-0000-000000000000}"/>
-          </ac:spMkLst>
-        </pc:spChg>
-        <pc:spChg chg="mod">
-          <ac:chgData name="Eder Silva" userId="9b7f41b4-798d-40cf-8f87-8e33ae7a0417" providerId="ADAL" clId="{DFF9E84E-5922-4F26-9EAD-8AB4E668133E}" dt="2026-10-27T14:37:55.187" v="207" actId="947"/>
-          <ac:spMkLst>
-            <pc:docMk/>
-            <pc:sldMk cId="2773046875" sldId="307"/>
-            <ac:spMk id="7" creationId="{00000000-0000-0000-0000-000000000000}"/>
-          </ac:spMkLst>
-        </pc:spChg>
-        <pc:spChg chg="mod">
-          <ac:chgData name="Eder Silva" userId="9b7f41b4-798d-40cf-8f87-8e33ae7a0417" providerId="ADAL" clId="{DFF9E84E-5922-4F26-9EAD-8AB4E668133E}" dt="2026-10-27T14:37:55.191" v="208" actId="947"/>
-          <ac:spMkLst>
-            <pc:docMk/>
-            <pc:sldMk cId="2773046875" sldId="307"/>
-            <ac:spMk id="9" creationId="{00000000-0000-0000-0000-000000000000}"/>
-          </ac:spMkLst>
-        </pc:spChg>
-        <pc:spChg chg="mod">
-          <ac:chgData name="Eder Silva" userId="9b7f41b4-798d-40cf-8f87-8e33ae7a0417" providerId="ADAL" clId="{DFF9E84E-5922-4F26-9EAD-8AB4E668133E}" dt="2026-10-27T14:37:55.194" v="209" actId="947"/>
-          <ac:spMkLst>
-            <pc:docMk/>
-            <pc:sldMk cId="2773046875" sldId="307"/>
-            <ac:spMk id="11" creationId="{00000000-0000-0000-0000-000000000000}"/>
-          </ac:spMkLst>
-        </pc:spChg>
-        <pc:spChg chg="mod">
-          <ac:chgData name="Eder Silva" userId="9b7f41b4-798d-40cf-8f87-8e33ae7a0417" providerId="ADAL" clId="{DFF9E84E-5922-4F26-9EAD-8AB4E668133E}" dt="2026-10-27T15:51:21.153" v="664" actId="947"/>
-          <ac:spMkLst>
-            <pc:docMk/>
-            <pc:sldMk cId="2773046875" sldId="307"/>
-            <ac:spMk id="12" creationId="{00000000-0000-0000-0000-000000000000}"/>
-          </ac:spMkLst>
-        </pc:spChg>
-      </pc:sldChg>
-      <pc:sldChg chg="modSp add del mod ord modNotes">
-        <pc:chgData name="Eder Silva" userId="9b7f41b4-798d-40cf-8f87-8e33ae7a0417" providerId="ADAL" clId="{DFF9E84E-5922-4F26-9EAD-8AB4E668133E}" dt="2026-10-27T20:24:35.772" v="1724" actId="2696"/>
-        <pc:sldMkLst>
-          <pc:docMk/>
-          <pc:sldMk cId="1382669071" sldId="308"/>
-        </pc:sldMkLst>
-        <pc:spChg chg="mod">
-          <ac:chgData name="Eder Silva" userId="9b7f41b4-798d-40cf-8f87-8e33ae7a0417" providerId="ADAL" clId="{DFF9E84E-5922-4F26-9EAD-8AB4E668133E}" dt="2026-10-27T14:37:55.238" v="215" actId="20577"/>
-          <ac:spMkLst>
-            <pc:docMk/>
-            <pc:sldMk cId="1382669071" sldId="308"/>
-            <ac:spMk id="3" creationId="{00000000-0000-0000-0000-000000000000}"/>
-          </ac:spMkLst>
-        </pc:spChg>
-        <pc:spChg chg="mod">
-          <ac:chgData name="Eder Silva" userId="9b7f41b4-798d-40cf-8f87-8e33ae7a0417" providerId="ADAL" clId="{DFF9E84E-5922-4F26-9EAD-8AB4E668133E}" dt="2026-10-27T14:37:55.480" v="221" actId="947"/>
-          <ac:spMkLst>
-            <pc:docMk/>
-            <pc:sldMk cId="1382669071" sldId="308"/>
-            <ac:spMk id="5" creationId="{00000000-0000-0000-0000-000000000000}"/>
-          </ac:spMkLst>
-        </pc:spChg>
-        <pc:spChg chg="mod">
-          <ac:chgData name="Eder Silva" userId="9b7f41b4-798d-40cf-8f87-8e33ae7a0417" providerId="ADAL" clId="{DFF9E84E-5922-4F26-9EAD-8AB4E668133E}" dt="2026-10-27T14:37:55.484" v="222" actId="947"/>
-          <ac:spMkLst>
-            <pc:docMk/>
-            <pc:sldMk cId="1382669071" sldId="308"/>
-            <ac:spMk id="7" creationId="{00000000-0000-0000-0000-000000000000}"/>
-          </ac:spMkLst>
-        </pc:spChg>
-        <pc:spChg chg="mod">
-          <ac:chgData name="Eder Silva" userId="9b7f41b4-798d-40cf-8f87-8e33ae7a0417" providerId="ADAL" clId="{DFF9E84E-5922-4F26-9EAD-8AB4E668133E}" dt="2026-10-27T14:37:55.488" v="223" actId="947"/>
-          <ac:spMkLst>
-            <pc:docMk/>
-            <pc:sldMk cId="1382669071" sldId="308"/>
-            <ac:spMk id="9" creationId="{00000000-0000-0000-0000-000000000000}"/>
-          </ac:spMkLst>
-        </pc:spChg>
-        <pc:spChg chg="mod">
-          <ac:chgData name="Eder Silva" userId="9b7f41b4-798d-40cf-8f87-8e33ae7a0417" providerId="ADAL" clId="{DFF9E84E-5922-4F26-9EAD-8AB4E668133E}" dt="2026-10-27T14:37:55.493" v="224" actId="947"/>
-          <ac:spMkLst>
-            <pc:docMk/>
-            <pc:sldMk cId="1382669071" sldId="308"/>
-            <ac:spMk id="11" creationId="{00000000-0000-0000-0000-000000000000}"/>
-          </ac:spMkLst>
-        </pc:spChg>
-        <pc:spChg chg="mod">
-          <ac:chgData name="Eder Silva" userId="9b7f41b4-798d-40cf-8f87-8e33ae7a0417" providerId="ADAL" clId="{DFF9E84E-5922-4F26-9EAD-8AB4E668133E}" dt="2026-10-27T14:37:55.497" v="225" actId="947"/>
-          <ac:spMkLst>
-            <pc:docMk/>
-            <pc:sldMk cId="1382669071" sldId="308"/>
-            <ac:spMk id="13" creationId="{00000000-0000-0000-0000-000000000000}"/>
-          </ac:spMkLst>
-        </pc:spChg>
-        <pc:spChg chg="mod">
-          <ac:chgData name="Eder Silva" userId="9b7f41b4-798d-40cf-8f87-8e33ae7a0417" providerId="ADAL" clId="{DFF9E84E-5922-4F26-9EAD-8AB4E668133E}" dt="2026-10-27T15:51:21.332" v="688" actId="947"/>
-          <ac:spMkLst>
-            <pc:docMk/>
-            <pc:sldMk cId="1382669071" sldId="308"/>
-            <ac:spMk id="14" creationId="{00000000-0000-0000-0000-000000000000}"/>
-          </ac:spMkLst>
-        </pc:spChg>
-      </pc:sldChg>
-      <pc:sldChg chg="modSp add del mod ord modNotes">
-        <pc:chgData name="Eder Silva" userId="9b7f41b4-798d-40cf-8f87-8e33ae7a0417" providerId="ADAL" clId="{DFF9E84E-5922-4F26-9EAD-8AB4E668133E}" dt="2026-10-27T20:24:35.770" v="1723" actId="2696"/>
-        <pc:sldMkLst>
-          <pc:docMk/>
-          <pc:sldMk cId="1203208377" sldId="309"/>
-        </pc:sldMkLst>
-        <pc:spChg chg="mod">
-          <ac:chgData name="Eder Silva" userId="9b7f41b4-798d-40cf-8f87-8e33ae7a0417" providerId="ADAL" clId="{DFF9E84E-5922-4F26-9EAD-8AB4E668133E}" dt="2026-10-27T14:37:55.540" v="231" actId="20577"/>
-          <ac:spMkLst>
-            <pc:docMk/>
-            <pc:sldMk cId="1203208377" sldId="309"/>
-            <ac:spMk id="3" creationId="{00000000-0000-0000-0000-000000000000}"/>
-          </ac:spMkLst>
-        </pc:spChg>
-        <pc:spChg chg="mod">
-          <ac:chgData name="Eder Silva" userId="9b7f41b4-798d-40cf-8f87-8e33ae7a0417" providerId="ADAL" clId="{DFF9E84E-5922-4F26-9EAD-8AB4E668133E}" dt="2026-10-27T14:37:55.751" v="236" actId="947"/>
-          <ac:spMkLst>
-            <pc:docMk/>
-            <pc:sldMk cId="1203208377" sldId="309"/>
-            <ac:spMk id="5" creationId="{00000000-0000-0000-0000-000000000000}"/>
-          </ac:spMkLst>
-        </pc:spChg>
-        <pc:spChg chg="mod">
-          <ac:chgData name="Eder Silva" userId="9b7f41b4-798d-40cf-8f87-8e33ae7a0417" providerId="ADAL" clId="{DFF9E84E-5922-4F26-9EAD-8AB4E668133E}" dt="2026-10-27T14:37:55.755" v="237" actId="947"/>
-          <ac:spMkLst>
-            <pc:docMk/>
-            <pc:sldMk cId="1203208377" sldId="309"/>
-            <ac:spMk id="7" creationId="{00000000-0000-0000-0000-000000000000}"/>
-          </ac:spMkLst>
-        </pc:spChg>
-        <pc:spChg chg="mod">
-          <ac:chgData name="Eder Silva" userId="9b7f41b4-798d-40cf-8f87-8e33ae7a0417" providerId="ADAL" clId="{DFF9E84E-5922-4F26-9EAD-8AB4E668133E}" dt="2026-10-27T14:37:55.759" v="238" actId="947"/>
-          <ac:spMkLst>
-            <pc:docMk/>
-            <pc:sldMk cId="1203208377" sldId="309"/>
-            <ac:spMk id="9" creationId="{00000000-0000-0000-0000-000000000000}"/>
-          </ac:spMkLst>
-        </pc:spChg>
-        <pc:spChg chg="mod">
-          <ac:chgData name="Eder Silva" userId="9b7f41b4-798d-40cf-8f87-8e33ae7a0417" providerId="ADAL" clId="{DFF9E84E-5922-4F26-9EAD-8AB4E668133E}" dt="2026-10-27T14:37:55.763" v="239" actId="947"/>
-          <ac:spMkLst>
-            <pc:docMk/>
-            <pc:sldMk cId="1203208377" sldId="309"/>
-            <ac:spMk id="11" creationId="{00000000-0000-0000-0000-000000000000}"/>
-          </ac:spMkLst>
-        </pc:spChg>
-        <pc:spChg chg="mod">
-          <ac:chgData name="Eder Silva" userId="9b7f41b4-798d-40cf-8f87-8e33ae7a0417" providerId="ADAL" clId="{DFF9E84E-5922-4F26-9EAD-8AB4E668133E}" dt="2026-10-27T15:51:21.472" v="708" actId="947"/>
-          <ac:spMkLst>
-            <pc:docMk/>
-            <pc:sldMk cId="1203208377" sldId="309"/>
-            <ac:spMk id="12" creationId="{00000000-0000-0000-0000-000000000000}"/>
-          </ac:spMkLst>
-        </pc:spChg>
-      </pc:sldChg>
-      <pc:sldChg chg="modSp add del mod ord modNotes">
-        <pc:chgData name="Eder Silva" userId="9b7f41b4-798d-40cf-8f87-8e33ae7a0417" providerId="ADAL" clId="{DFF9E84E-5922-4F26-9EAD-8AB4E668133E}" dt="2026-10-27T20:24:35.768" v="1722" actId="2696"/>
-        <pc:sldMkLst>
-          <pc:docMk/>
-          <pc:sldMk cId="1828763092" sldId="310"/>
-        </pc:sldMkLst>
-        <pc:spChg chg="mod">
-          <ac:chgData name="Eder Silva" userId="9b7f41b4-798d-40cf-8f87-8e33ae7a0417" providerId="ADAL" clId="{DFF9E84E-5922-4F26-9EAD-8AB4E668133E}" dt="2026-10-27T15:42:55.730" v="518" actId="20577"/>
-          <ac:spMkLst>
-            <pc:docMk/>
-            <pc:sldMk cId="1828763092" sldId="310"/>
-            <ac:spMk id="3" creationId="{00000000-0000-0000-0000-000000000000}"/>
-          </ac:spMkLst>
-        </pc:spChg>
-        <pc:spChg chg="mod">
-          <ac:chgData name="Eder Silva" userId="9b7f41b4-798d-40cf-8f87-8e33ae7a0417" providerId="ADAL" clId="{DFF9E84E-5922-4F26-9EAD-8AB4E668133E}" dt="2026-10-27T15:43:08.424" v="520" actId="20577"/>
-          <ac:spMkLst>
-            <pc:docMk/>
-            <pc:sldMk cId="1828763092" sldId="310"/>
-            <ac:spMk id="5" creationId="{00000000-0000-0000-0000-000000000000}"/>
-          </ac:spMkLst>
-        </pc:spChg>
-        <pc:spChg chg="mod">
-          <ac:chgData name="Eder Silva" userId="9b7f41b4-798d-40cf-8f87-8e33ae7a0417" providerId="ADAL" clId="{DFF9E84E-5922-4F26-9EAD-8AB4E668133E}" dt="2026-10-27T14:37:56.083" v="251" actId="947"/>
-          <ac:spMkLst>
-            <pc:docMk/>
-            <pc:sldMk cId="1828763092" sldId="310"/>
-            <ac:spMk id="7" creationId="{00000000-0000-0000-0000-000000000000}"/>
-          </ac:spMkLst>
-        </pc:spChg>
-        <pc:spChg chg="mod">
-          <ac:chgData name="Eder Silva" userId="9b7f41b4-798d-40cf-8f87-8e33ae7a0417" providerId="ADAL" clId="{DFF9E84E-5922-4F26-9EAD-8AB4E668133E}" dt="2026-10-27T14:37:56.087" v="252" actId="947"/>
-          <ac:spMkLst>
-            <pc:docMk/>
-            <pc:sldMk cId="1828763092" sldId="310"/>
-            <ac:spMk id="9" creationId="{00000000-0000-0000-0000-000000000000}"/>
-          </ac:spMkLst>
-        </pc:spChg>
-        <pc:spChg chg="mod">
-          <ac:chgData name="Eder Silva" userId="9b7f41b4-798d-40cf-8f87-8e33ae7a0417" providerId="ADAL" clId="{DFF9E84E-5922-4F26-9EAD-8AB4E668133E}" dt="2026-10-27T14:37:56.091" v="253" actId="947"/>
-          <ac:spMkLst>
-            <pc:docMk/>
-            <pc:sldMk cId="1828763092" sldId="310"/>
-            <ac:spMk id="11" creationId="{00000000-0000-0000-0000-000000000000}"/>
-          </ac:spMkLst>
-        </pc:spChg>
-        <pc:spChg chg="mod">
-          <ac:chgData name="Eder Silva" userId="9b7f41b4-798d-40cf-8f87-8e33ae7a0417" providerId="ADAL" clId="{DFF9E84E-5922-4F26-9EAD-8AB4E668133E}" dt="2026-10-27T15:51:21.566" v="720" actId="947"/>
-          <ac:spMkLst>
-            <pc:docMk/>
-            <pc:sldMk cId="1828763092" sldId="310"/>
-            <ac:spMk id="12" creationId="{00000000-0000-0000-0000-000000000000}"/>
-          </ac:spMkLst>
-        </pc:spChg>
-      </pc:sldChg>
-      <pc:sldChg chg="modSp add del mod ord modNotes">
-        <pc:chgData name="Eder Silva" userId="9b7f41b4-798d-40cf-8f87-8e33ae7a0417" providerId="ADAL" clId="{DFF9E84E-5922-4F26-9EAD-8AB4E668133E}" dt="2026-10-27T20:24:35.766" v="1721" actId="2696"/>
-        <pc:sldMkLst>
-          <pc:docMk/>
-          <pc:sldMk cId="2804858423" sldId="311"/>
-        </pc:sldMkLst>
-        <pc:spChg chg="mod">
-          <ac:chgData name="Eder Silva" userId="9b7f41b4-798d-40cf-8f87-8e33ae7a0417" providerId="ADAL" clId="{DFF9E84E-5922-4F26-9EAD-8AB4E668133E}" dt="2026-10-27T14:37:56.140" v="259" actId="20577"/>
-          <ac:spMkLst>
-            <pc:docMk/>
-            <pc:sldMk cId="2804858423" sldId="311"/>
-            <ac:spMk id="3" creationId="{00000000-0000-0000-0000-000000000000}"/>
-          </ac:spMkLst>
-        </pc:spChg>
-        <pc:spChg chg="mod">
-          <ac:chgData name="Eder Silva" userId="9b7f41b4-798d-40cf-8f87-8e33ae7a0417" providerId="ADAL" clId="{DFF9E84E-5922-4F26-9EAD-8AB4E668133E}" dt="2026-10-27T14:37:56.343" v="264" actId="947"/>
-          <ac:spMkLst>
-            <pc:docMk/>
-            <pc:sldMk cId="2804858423" sldId="311"/>
-            <ac:spMk id="5" creationId="{00000000-0000-0000-0000-000000000000}"/>
-          </ac:spMkLst>
-        </pc:spChg>
-        <pc:spChg chg="mod">
-          <ac:chgData name="Eder Silva" userId="9b7f41b4-798d-40cf-8f87-8e33ae7a0417" providerId="ADAL" clId="{DFF9E84E-5922-4F26-9EAD-8AB4E668133E}" dt="2026-10-27T14:37:56.347" v="265" actId="947"/>
-          <ac:spMkLst>
-            <pc:docMk/>
-            <pc:sldMk cId="2804858423" sldId="311"/>
-            <ac:spMk id="7" creationId="{00000000-0000-0000-0000-000000000000}"/>
-          </ac:spMkLst>
-        </pc:spChg>
-        <pc:spChg chg="mod">
-          <ac:chgData name="Eder Silva" userId="9b7f41b4-798d-40cf-8f87-8e33ae7a0417" providerId="ADAL" clId="{DFF9E84E-5922-4F26-9EAD-8AB4E668133E}" dt="2026-10-27T14:37:56.352" v="266" actId="947"/>
-          <ac:spMkLst>
-            <pc:docMk/>
-            <pc:sldMk cId="2804858423" sldId="311"/>
-            <ac:spMk id="9" creationId="{00000000-0000-0000-0000-000000000000}"/>
-          </ac:spMkLst>
-        </pc:spChg>
-        <pc:spChg chg="mod">
-          <ac:chgData name="Eder Silva" userId="9b7f41b4-798d-40cf-8f87-8e33ae7a0417" providerId="ADAL" clId="{DFF9E84E-5922-4F26-9EAD-8AB4E668133E}" dt="2026-10-27T14:37:56.356" v="267" actId="947"/>
-          <ac:spMkLst>
-            <pc:docMk/>
-            <pc:sldMk cId="2804858423" sldId="311"/>
-            <ac:spMk id="11" creationId="{00000000-0000-0000-0000-000000000000}"/>
-          </ac:spMkLst>
-        </pc:spChg>
-        <pc:spChg chg="mod">
-          <ac:chgData name="Eder Silva" userId="9b7f41b4-798d-40cf-8f87-8e33ae7a0417" providerId="ADAL" clId="{DFF9E84E-5922-4F26-9EAD-8AB4E668133E}" dt="2026-10-27T15:51:21.634" v="728" actId="947"/>
-          <ac:spMkLst>
-            <pc:docMk/>
-            <pc:sldMk cId="2804858423" sldId="311"/>
-            <ac:spMk id="12" creationId="{00000000-0000-0000-0000-000000000000}"/>
-          </ac:spMkLst>
-        </pc:spChg>
-      </pc:sldChg>
-      <pc:sldChg chg="modSp add del mod ord modNotes">
-        <pc:chgData name="Eder Silva" userId="9b7f41b4-798d-40cf-8f87-8e33ae7a0417" providerId="ADAL" clId="{DFF9E84E-5922-4F26-9EAD-8AB4E668133E}" dt="2026-10-27T20:24:35.763" v="1720" actId="2696"/>
-        <pc:sldMkLst>
-          <pc:docMk/>
-          <pc:sldMk cId="849568494" sldId="312"/>
-        </pc:sldMkLst>
-        <pc:spChg chg="mod">
-          <ac:chgData name="Eder Silva" userId="9b7f41b4-798d-40cf-8f87-8e33ae7a0417" providerId="ADAL" clId="{DFF9E84E-5922-4F26-9EAD-8AB4E668133E}" dt="2026-10-27T14:37:56.400" v="273" actId="20577"/>
-          <ac:spMkLst>
-            <pc:docMk/>
-            <pc:sldMk cId="849568494" sldId="312"/>
-            <ac:spMk id="3" creationId="{00000000-0000-0000-0000-000000000000}"/>
-          </ac:spMkLst>
-        </pc:spChg>
-        <pc:spChg chg="mod">
-          <ac:chgData name="Eder Silva" userId="9b7f41b4-798d-40cf-8f87-8e33ae7a0417" providerId="ADAL" clId="{DFF9E84E-5922-4F26-9EAD-8AB4E668133E}" dt="2026-10-27T14:37:56.638" v="278" actId="947"/>
-          <ac:spMkLst>
-            <pc:docMk/>
-            <pc:sldMk cId="849568494" sldId="312"/>
-            <ac:spMk id="5" creationId="{00000000-0000-0000-0000-000000000000}"/>
-          </ac:spMkLst>
-        </pc:spChg>
-        <pc:spChg chg="mod">
-          <ac:chgData name="Eder Silva" userId="9b7f41b4-798d-40cf-8f87-8e33ae7a0417" providerId="ADAL" clId="{DFF9E84E-5922-4F26-9EAD-8AB4E668133E}" dt="2026-10-27T14:37:56.642" v="279" actId="947"/>
-          <ac:spMkLst>
-            <pc:docMk/>
-            <pc:sldMk cId="849568494" sldId="312"/>
-            <ac:spMk id="7" creationId="{00000000-0000-0000-0000-000000000000}"/>
-          </ac:spMkLst>
-        </pc:spChg>
-        <pc:spChg chg="mod">
-          <ac:chgData name="Eder Silva" userId="9b7f41b4-798d-40cf-8f87-8e33ae7a0417" providerId="ADAL" clId="{DFF9E84E-5922-4F26-9EAD-8AB4E668133E}" dt="2026-10-27T14:37:56.646" v="280" actId="947"/>
-          <ac:spMkLst>
-            <pc:docMk/>
-            <pc:sldMk cId="849568494" sldId="312"/>
-            <ac:spMk id="9" creationId="{00000000-0000-0000-0000-000000000000}"/>
-          </ac:spMkLst>
-        </pc:spChg>
-        <pc:spChg chg="mod">
-          <ac:chgData name="Eder Silva" userId="9b7f41b4-798d-40cf-8f87-8e33ae7a0417" providerId="ADAL" clId="{DFF9E84E-5922-4F26-9EAD-8AB4E668133E}" dt="2026-10-27T14:37:56.651" v="281" actId="947"/>
-          <ac:spMkLst>
-            <pc:docMk/>
-            <pc:sldMk cId="849568494" sldId="312"/>
-            <ac:spMk id="11" creationId="{00000000-0000-0000-0000-000000000000}"/>
-          </ac:spMkLst>
-        </pc:spChg>
-        <pc:spChg chg="mod">
-          <ac:chgData name="Eder Silva" userId="9b7f41b4-798d-40cf-8f87-8e33ae7a0417" providerId="ADAL" clId="{DFF9E84E-5922-4F26-9EAD-8AB4E668133E}" dt="2026-10-27T15:51:21.729" v="740" actId="947"/>
-          <ac:spMkLst>
-            <pc:docMk/>
-            <pc:sldMk cId="849568494" sldId="312"/>
-            <ac:spMk id="12" creationId="{00000000-0000-0000-0000-000000000000}"/>
-          </ac:spMkLst>
-        </pc:spChg>
-      </pc:sldChg>
-      <pc:sldChg chg="modSp add del mod ord modNotes">
-        <pc:chgData name="Eder Silva" userId="9b7f41b4-798d-40cf-8f87-8e33ae7a0417" providerId="ADAL" clId="{DFF9E84E-5922-4F26-9EAD-8AB4E668133E}" dt="2026-10-27T20:24:35.760" v="1719" actId="2696"/>
-        <pc:sldMkLst>
-          <pc:docMk/>
-          <pc:sldMk cId="2312422262" sldId="313"/>
-        </pc:sldMkLst>
-        <pc:spChg chg="mod">
-          <ac:chgData name="Eder Silva" userId="9b7f41b4-798d-40cf-8f87-8e33ae7a0417" providerId="ADAL" clId="{DFF9E84E-5922-4F26-9EAD-8AB4E668133E}" dt="2026-10-27T14:37:56.696" v="288" actId="20577"/>
-          <ac:spMkLst>
-            <pc:docMk/>
-            <pc:sldMk cId="2312422262" sldId="313"/>
-            <ac:spMk id="2" creationId="{00000000-0000-0000-0000-000000000000}"/>
-          </ac:spMkLst>
-        </pc:spChg>
-        <pc:spChg chg="mod">
-          <ac:chgData name="Eder Silva" userId="9b7f41b4-798d-40cf-8f87-8e33ae7a0417" providerId="ADAL" clId="{DFF9E84E-5922-4F26-9EAD-8AB4E668133E}" dt="2026-10-27T14:37:56.703" v="289" actId="20577"/>
-          <ac:spMkLst>
-            <pc:docMk/>
-            <pc:sldMk cId="2312422262" sldId="313"/>
-            <ac:spMk id="3" creationId="{00000000-0000-0000-0000-000000000000}"/>
-          </ac:spMkLst>
-        </pc:spChg>
-      </pc:sldChg>
-      <pc:sldChg chg="modSp add del mod ord modNotes">
-        <pc:chgData name="Eder Silva" userId="9b7f41b4-798d-40cf-8f87-8e33ae7a0417" providerId="ADAL" clId="{DFF9E84E-5922-4F26-9EAD-8AB4E668133E}" dt="2026-10-27T20:24:35.758" v="1718" actId="2696"/>
-        <pc:sldMkLst>
-          <pc:docMk/>
-          <pc:sldMk cId="1880627143" sldId="314"/>
-        </pc:sldMkLst>
-        <pc:spChg chg="mod">
-          <ac:chgData name="Eder Silva" userId="9b7f41b4-798d-40cf-8f87-8e33ae7a0417" providerId="ADAL" clId="{DFF9E84E-5922-4F26-9EAD-8AB4E668133E}" dt="2026-10-27T14:37:56.743" v="294" actId="20577"/>
-          <ac:spMkLst>
-            <pc:docMk/>
-            <pc:sldMk cId="1880627143" sldId="314"/>
-            <ac:spMk id="3" creationId="{00000000-0000-0000-0000-000000000000}"/>
-          </ac:spMkLst>
-        </pc:spChg>
-        <pc:spChg chg="mod">
-          <ac:chgData name="Eder Silva" userId="9b7f41b4-798d-40cf-8f87-8e33ae7a0417" providerId="ADAL" clId="{DFF9E84E-5922-4F26-9EAD-8AB4E668133E}" dt="2026-10-27T14:37:56.749" v="295" actId="20577"/>
-          <ac:spMkLst>
-            <pc:docMk/>
-            <pc:sldMk cId="1880627143" sldId="314"/>
-            <ac:spMk id="4" creationId="{00000000-0000-0000-0000-000000000000}"/>
-          </ac:spMkLst>
-        </pc:spChg>
-        <pc:spChg chg="mod">
-          <ac:chgData name="Eder Silva" userId="9b7f41b4-798d-40cf-8f87-8e33ae7a0417" providerId="ADAL" clId="{DFF9E84E-5922-4F26-9EAD-8AB4E668133E}" dt="2026-10-27T15:51:21.844" v="756" actId="947"/>
-          <ac:spMkLst>
-            <pc:docMk/>
-            <pc:sldMk cId="1880627143" sldId="314"/>
-            <ac:spMk id="6" creationId="{00000000-0000-0000-0000-000000000000}"/>
-          </ac:spMkLst>
-        </pc:spChg>
-      </pc:sldChg>
-      <pc:sldChg chg="modSp add del mod ord modNotes">
-        <pc:chgData name="Eder Silva" userId="9b7f41b4-798d-40cf-8f87-8e33ae7a0417" providerId="ADAL" clId="{DFF9E84E-5922-4F26-9EAD-8AB4E668133E}" dt="2026-10-27T20:24:35.755" v="1717" actId="2696"/>
-        <pc:sldMkLst>
-          <pc:docMk/>
-          <pc:sldMk cId="1157505591" sldId="315"/>
-        </pc:sldMkLst>
-        <pc:spChg chg="mod">
-          <ac:chgData name="Eder Silva" userId="9b7f41b4-798d-40cf-8f87-8e33ae7a0417" providerId="ADAL" clId="{DFF9E84E-5922-4F26-9EAD-8AB4E668133E}" dt="2026-10-27T14:37:56.797" v="301" actId="20577"/>
-          <ac:spMkLst>
-            <pc:docMk/>
-            <pc:sldMk cId="1157505591" sldId="315"/>
-            <ac:spMk id="3" creationId="{00000000-0000-0000-0000-000000000000}"/>
-          </ac:spMkLst>
-        </pc:spChg>
-        <pc:spChg chg="mod">
-          <ac:chgData name="Eder Silva" userId="9b7f41b4-798d-40cf-8f87-8e33ae7a0417" providerId="ADAL" clId="{DFF9E84E-5922-4F26-9EAD-8AB4E668133E}" dt="2026-10-27T14:37:57.009" v="306" actId="947"/>
-          <ac:spMkLst>
-            <pc:docMk/>
-            <pc:sldMk cId="1157505591" sldId="315"/>
-            <ac:spMk id="5" creationId="{00000000-0000-0000-0000-000000000000}"/>
-          </ac:spMkLst>
-        </pc:spChg>
-        <pc:spChg chg="mod">
-          <ac:chgData name="Eder Silva" userId="9b7f41b4-798d-40cf-8f87-8e33ae7a0417" providerId="ADAL" clId="{DFF9E84E-5922-4F26-9EAD-8AB4E668133E}" dt="2026-10-27T14:37:57.013" v="307" actId="947"/>
-          <ac:spMkLst>
-            <pc:docMk/>
-            <pc:sldMk cId="1157505591" sldId="315"/>
-            <ac:spMk id="7" creationId="{00000000-0000-0000-0000-000000000000}"/>
-          </ac:spMkLst>
-        </pc:spChg>
-        <pc:spChg chg="mod">
-          <ac:chgData name="Eder Silva" userId="9b7f41b4-798d-40cf-8f87-8e33ae7a0417" providerId="ADAL" clId="{DFF9E84E-5922-4F26-9EAD-8AB4E668133E}" dt="2026-10-27T14:37:57.017" v="308" actId="947"/>
-          <ac:spMkLst>
-            <pc:docMk/>
-            <pc:sldMk cId="1157505591" sldId="315"/>
-            <ac:spMk id="9" creationId="{00000000-0000-0000-0000-000000000000}"/>
-          </ac:spMkLst>
-        </pc:spChg>
-        <pc:spChg chg="mod">
-          <ac:chgData name="Eder Silva" userId="9b7f41b4-798d-40cf-8f87-8e33ae7a0417" providerId="ADAL" clId="{DFF9E84E-5922-4F26-9EAD-8AB4E668133E}" dt="2026-10-27T14:37:57.021" v="309" actId="947"/>
-          <ac:spMkLst>
-            <pc:docMk/>
-            <pc:sldMk cId="1157505591" sldId="315"/>
-            <ac:spMk id="11" creationId="{00000000-0000-0000-0000-000000000000}"/>
-          </ac:spMkLst>
-        </pc:spChg>
-        <pc:spChg chg="mod">
-          <ac:chgData name="Eder Silva" userId="9b7f41b4-798d-40cf-8f87-8e33ae7a0417" providerId="ADAL" clId="{DFF9E84E-5922-4F26-9EAD-8AB4E668133E}" dt="2026-10-27T15:51:21.929" v="768" actId="947"/>
-          <ac:spMkLst>
-            <pc:docMk/>
-            <pc:sldMk cId="1157505591" sldId="315"/>
-            <ac:spMk id="12" creationId="{00000000-0000-0000-0000-000000000000}"/>
-          </ac:spMkLst>
-        </pc:spChg>
-      </pc:sldChg>
-      <pc:sldChg chg="modSp add del mod ord modNotes">
-        <pc:chgData name="Eder Silva" userId="9b7f41b4-798d-40cf-8f87-8e33ae7a0417" providerId="ADAL" clId="{DFF9E84E-5922-4F26-9EAD-8AB4E668133E}" dt="2026-10-27T20:24:35.753" v="1716" actId="2696"/>
-        <pc:sldMkLst>
-          <pc:docMk/>
-          <pc:sldMk cId="1559015988" sldId="316"/>
-        </pc:sldMkLst>
-        <pc:spChg chg="mod">
-          <ac:chgData name="Eder Silva" userId="9b7f41b4-798d-40cf-8f87-8e33ae7a0417" providerId="ADAL" clId="{DFF9E84E-5922-4F26-9EAD-8AB4E668133E}" dt="2026-10-27T14:37:57.072" v="315" actId="20577"/>
-          <ac:spMkLst>
-            <pc:docMk/>
-            <pc:sldMk cId="1559015988" sldId="316"/>
-            <ac:spMk id="3" creationId="{00000000-0000-0000-0000-000000000000}"/>
-          </ac:spMkLst>
-        </pc:spChg>
-        <pc:spChg chg="mod">
-          <ac:chgData name="Eder Silva" userId="9b7f41b4-798d-40cf-8f87-8e33ae7a0417" providerId="ADAL" clId="{DFF9E84E-5922-4F26-9EAD-8AB4E668133E}" dt="2026-10-27T14:37:57.351" v="321" actId="947"/>
-          <ac:spMkLst>
-            <pc:docMk/>
-            <pc:sldMk cId="1559015988" sldId="316"/>
-            <ac:spMk id="5" creationId="{00000000-0000-0000-0000-000000000000}"/>
-          </ac:spMkLst>
-        </pc:spChg>
-        <pc:spChg chg="mod">
-          <ac:chgData name="Eder Silva" userId="9b7f41b4-798d-40cf-8f87-8e33ae7a0417" providerId="ADAL" clId="{DFF9E84E-5922-4F26-9EAD-8AB4E668133E}" dt="2026-10-27T14:37:57.355" v="322" actId="947"/>
-          <ac:spMkLst>
-            <pc:docMk/>
-            <pc:sldMk cId="1559015988" sldId="316"/>
-            <ac:spMk id="7" creationId="{00000000-0000-0000-0000-000000000000}"/>
-          </ac:spMkLst>
-        </pc:spChg>
-        <pc:spChg chg="mod">
-          <ac:chgData name="Eder Silva" userId="9b7f41b4-798d-40cf-8f87-8e33ae7a0417" providerId="ADAL" clId="{DFF9E84E-5922-4F26-9EAD-8AB4E668133E}" dt="2026-10-27T14:37:57.359" v="323" actId="947"/>
-          <ac:spMkLst>
-            <pc:docMk/>
-            <pc:sldMk cId="1559015988" sldId="316"/>
-            <ac:spMk id="9" creationId="{00000000-0000-0000-0000-000000000000}"/>
-          </ac:spMkLst>
-        </pc:spChg>
-        <pc:spChg chg="mod">
-          <ac:chgData name="Eder Silva" userId="9b7f41b4-798d-40cf-8f87-8e33ae7a0417" providerId="ADAL" clId="{DFF9E84E-5922-4F26-9EAD-8AB4E668133E}" dt="2026-10-27T14:37:57.364" v="324" actId="947"/>
-          <ac:spMkLst>
-            <pc:docMk/>
-            <pc:sldMk cId="1559015988" sldId="316"/>
-            <ac:spMk id="11" creationId="{00000000-0000-0000-0000-000000000000}"/>
-          </ac:spMkLst>
-        </pc:spChg>
-        <pc:spChg chg="mod">
-          <ac:chgData name="Eder Silva" userId="9b7f41b4-798d-40cf-8f87-8e33ae7a0417" providerId="ADAL" clId="{DFF9E84E-5922-4F26-9EAD-8AB4E668133E}" dt="2026-10-27T14:37:57.368" v="325" actId="947"/>
-          <ac:spMkLst>
-            <pc:docMk/>
-            <pc:sldMk cId="1559015988" sldId="316"/>
-            <ac:spMk id="13" creationId="{00000000-0000-0000-0000-000000000000}"/>
-          </ac:spMkLst>
-        </pc:spChg>
-        <pc:spChg chg="mod">
-          <ac:chgData name="Eder Silva" userId="9b7f41b4-798d-40cf-8f87-8e33ae7a0417" providerId="ADAL" clId="{DFF9E84E-5922-4F26-9EAD-8AB4E668133E}" dt="2026-10-27T15:51:22.055" v="788" actId="947"/>
-          <ac:spMkLst>
-            <pc:docMk/>
-            <pc:sldMk cId="1559015988" sldId="316"/>
-            <ac:spMk id="14" creationId="{00000000-0000-0000-0000-000000000000}"/>
-          </ac:spMkLst>
-        </pc:spChg>
-      </pc:sldChg>
-      <pc:sldChg chg="modSp add del mod ord modNotes">
-        <pc:chgData name="Eder Silva" userId="9b7f41b4-798d-40cf-8f87-8e33ae7a0417" providerId="ADAL" clId="{DFF9E84E-5922-4F26-9EAD-8AB4E668133E}" dt="2026-10-27T20:24:35.750" v="1715" actId="2696"/>
-        <pc:sldMkLst>
-          <pc:docMk/>
-          <pc:sldMk cId="2416029850" sldId="317"/>
-        </pc:sldMkLst>
-        <pc:spChg chg="mod">
-          <ac:chgData name="Eder Silva" userId="9b7f41b4-798d-40cf-8f87-8e33ae7a0417" providerId="ADAL" clId="{DFF9E84E-5922-4F26-9EAD-8AB4E668133E}" dt="2026-10-27T14:37:57.405" v="331" actId="20577"/>
-          <ac:spMkLst>
-            <pc:docMk/>
-            <pc:sldMk cId="2416029850" sldId="317"/>
-            <ac:spMk id="2" creationId="{00000000-0000-0000-0000-000000000000}"/>
-          </ac:spMkLst>
-        </pc:spChg>
-        <pc:spChg chg="mod">
-          <ac:chgData name="Eder Silva" userId="9b7f41b4-798d-40cf-8f87-8e33ae7a0417" providerId="ADAL" clId="{DFF9E84E-5922-4F26-9EAD-8AB4E668133E}" dt="2026-10-27T14:37:57.410" v="332" actId="20577"/>
-          <ac:spMkLst>
-            <pc:docMk/>
-            <pc:sldMk cId="2416029850" sldId="317"/>
-            <ac:spMk id="3" creationId="{00000000-0000-0000-0000-000000000000}"/>
-          </ac:spMkLst>
-        </pc:spChg>
-      </pc:sldChg>
-      <pc:sldChg chg="modSp add del mod ord modNotes">
-        <pc:chgData name="Eder Silva" userId="9b7f41b4-798d-40cf-8f87-8e33ae7a0417" providerId="ADAL" clId="{DFF9E84E-5922-4F26-9EAD-8AB4E668133E}" dt="2026-10-27T20:24:35.747" v="1714" actId="2696"/>
-        <pc:sldMkLst>
-          <pc:docMk/>
-          <pc:sldMk cId="884681944" sldId="318"/>
-        </pc:sldMkLst>
-        <pc:spChg chg="mod">
-          <ac:chgData name="Eder Silva" userId="9b7f41b4-798d-40cf-8f87-8e33ae7a0417" providerId="ADAL" clId="{DFF9E84E-5922-4F26-9EAD-8AB4E668133E}" dt="2026-10-27T14:37:57.445" v="337" actId="20577"/>
-          <ac:spMkLst>
-            <pc:docMk/>
-            <pc:sldMk cId="884681944" sldId="318"/>
-            <ac:spMk id="3" creationId="{00000000-0000-0000-0000-000000000000}"/>
-          </ac:spMkLst>
-        </pc:spChg>
-        <pc:spChg chg="mod">
-          <ac:chgData name="Eder Silva" userId="9b7f41b4-798d-40cf-8f87-8e33ae7a0417" providerId="ADAL" clId="{DFF9E84E-5922-4F26-9EAD-8AB4E668133E}" dt="2026-10-27T14:37:57.652" v="342" actId="947"/>
-          <ac:spMkLst>
-            <pc:docMk/>
-            <pc:sldMk cId="884681944" sldId="318"/>
-            <ac:spMk id="5" creationId="{00000000-0000-0000-0000-000000000000}"/>
-          </ac:spMkLst>
-        </pc:spChg>
-        <pc:spChg chg="mod">
-          <ac:chgData name="Eder Silva" userId="9b7f41b4-798d-40cf-8f87-8e33ae7a0417" providerId="ADAL" clId="{DFF9E84E-5922-4F26-9EAD-8AB4E668133E}" dt="2026-10-27T14:37:57.656" v="343" actId="947"/>
-          <ac:spMkLst>
-            <pc:docMk/>
-            <pc:sldMk cId="884681944" sldId="318"/>
-            <ac:spMk id="7" creationId="{00000000-0000-0000-0000-000000000000}"/>
-          </ac:spMkLst>
-        </pc:spChg>
-        <pc:spChg chg="mod">
-          <ac:chgData name="Eder Silva" userId="9b7f41b4-798d-40cf-8f87-8e33ae7a0417" providerId="ADAL" clId="{DFF9E84E-5922-4F26-9EAD-8AB4E668133E}" dt="2026-10-27T14:37:57.659" v="344" actId="947"/>
-          <ac:spMkLst>
-            <pc:docMk/>
-            <pc:sldMk cId="884681944" sldId="318"/>
-            <ac:spMk id="9" creationId="{00000000-0000-0000-0000-000000000000}"/>
-          </ac:spMkLst>
-        </pc:spChg>
-        <pc:spChg chg="mod">
-          <ac:chgData name="Eder Silva" userId="9b7f41b4-798d-40cf-8f87-8e33ae7a0417" providerId="ADAL" clId="{DFF9E84E-5922-4F26-9EAD-8AB4E668133E}" dt="2026-10-27T15:44:25.511" v="521" actId="114"/>
-          <ac:spMkLst>
-            <pc:docMk/>
-            <pc:sldMk cId="884681944" sldId="318"/>
-            <ac:spMk id="11" creationId="{00000000-0000-0000-0000-000000000000}"/>
-          </ac:spMkLst>
-        </pc:spChg>
-        <pc:spChg chg="mod">
-          <ac:chgData name="Eder Silva" userId="9b7f41b4-798d-40cf-8f87-8e33ae7a0417" providerId="ADAL" clId="{DFF9E84E-5922-4F26-9EAD-8AB4E668133E}" dt="2026-10-27T15:51:22.161" v="804" actId="947"/>
-          <ac:spMkLst>
-            <pc:docMk/>
-            <pc:sldMk cId="884681944" sldId="318"/>
-            <ac:spMk id="12" creationId="{00000000-0000-0000-0000-000000000000}"/>
-          </ac:spMkLst>
-        </pc:spChg>
-      </pc:sldChg>
-      <pc:sldChg chg="modSp add del mod ord modNotes">
-        <pc:chgData name="Eder Silva" userId="9b7f41b4-798d-40cf-8f87-8e33ae7a0417" providerId="ADAL" clId="{DFF9E84E-5922-4F26-9EAD-8AB4E668133E}" dt="2026-10-27T20:24:35.744" v="1713" actId="2696"/>
-        <pc:sldMkLst>
-          <pc:docMk/>
-          <pc:sldMk cId="552525274" sldId="319"/>
-        </pc:sldMkLst>
-        <pc:spChg chg="mod">
-          <ac:chgData name="Eder Silva" userId="9b7f41b4-798d-40cf-8f87-8e33ae7a0417" providerId="ADAL" clId="{DFF9E84E-5922-4F26-9EAD-8AB4E668133E}" dt="2026-10-27T14:37:57.706" v="351" actId="20577"/>
-          <ac:spMkLst>
-            <pc:docMk/>
-            <pc:sldMk cId="552525274" sldId="319"/>
-            <ac:spMk id="3" creationId="{00000000-0000-0000-0000-000000000000}"/>
-          </ac:spMkLst>
-        </pc:spChg>
-        <pc:spChg chg="mod">
-          <ac:chgData name="Eder Silva" userId="9b7f41b4-798d-40cf-8f87-8e33ae7a0417" providerId="ADAL" clId="{DFF9E84E-5922-4F26-9EAD-8AB4E668133E}" dt="2026-10-27T14:37:57.904" v="356" actId="947"/>
-          <ac:spMkLst>
-            <pc:docMk/>
-            <pc:sldMk cId="552525274" sldId="319"/>
-            <ac:spMk id="5" creationId="{00000000-0000-0000-0000-000000000000}"/>
-          </ac:spMkLst>
-        </pc:spChg>
-        <pc:spChg chg="mod">
-          <ac:chgData name="Eder Silva" userId="9b7f41b4-798d-40cf-8f87-8e33ae7a0417" providerId="ADAL" clId="{DFF9E84E-5922-4F26-9EAD-8AB4E668133E}" dt="2026-10-27T14:37:57.908" v="357" actId="947"/>
-          <ac:spMkLst>
-            <pc:docMk/>
-            <pc:sldMk cId="552525274" sldId="319"/>
-            <ac:spMk id="7" creationId="{00000000-0000-0000-0000-000000000000}"/>
-          </ac:spMkLst>
-        </pc:spChg>
-        <pc:spChg chg="mod">
-          <ac:chgData name="Eder Silva" userId="9b7f41b4-798d-40cf-8f87-8e33ae7a0417" providerId="ADAL" clId="{DFF9E84E-5922-4F26-9EAD-8AB4E668133E}" dt="2026-10-27T14:37:57.913" v="358" actId="947"/>
-          <ac:spMkLst>
-            <pc:docMk/>
-            <pc:sldMk cId="552525274" sldId="319"/>
-            <ac:spMk id="9" creationId="{00000000-0000-0000-0000-000000000000}"/>
-          </ac:spMkLst>
-        </pc:spChg>
-        <pc:spChg chg="mod">
-          <ac:chgData name="Eder Silva" userId="9b7f41b4-798d-40cf-8f87-8e33ae7a0417" providerId="ADAL" clId="{DFF9E84E-5922-4F26-9EAD-8AB4E668133E}" dt="2026-10-27T14:37:57.917" v="359" actId="947"/>
-          <ac:spMkLst>
-            <pc:docMk/>
-            <pc:sldMk cId="552525274" sldId="319"/>
-            <ac:spMk id="11" creationId="{00000000-0000-0000-0000-000000000000}"/>
-          </ac:spMkLst>
-        </pc:spChg>
-        <pc:spChg chg="mod">
-          <ac:chgData name="Eder Silva" userId="9b7f41b4-798d-40cf-8f87-8e33ae7a0417" providerId="ADAL" clId="{DFF9E84E-5922-4F26-9EAD-8AB4E668133E}" dt="2026-10-27T15:51:22.284" v="824" actId="947"/>
-          <ac:spMkLst>
-            <pc:docMk/>
-            <pc:sldMk cId="552525274" sldId="319"/>
-            <ac:spMk id="12" creationId="{00000000-0000-0000-0000-000000000000}"/>
-          </ac:spMkLst>
-        </pc:spChg>
-      </pc:sldChg>
-      <pc:sldChg chg="modSp add del mod ord modNotes">
-        <pc:chgData name="Eder Silva" userId="9b7f41b4-798d-40cf-8f87-8e33ae7a0417" providerId="ADAL" clId="{DFF9E84E-5922-4F26-9EAD-8AB4E668133E}" dt="2026-10-27T20:24:35.742" v="1712" actId="2696"/>
-        <pc:sldMkLst>
-          <pc:docMk/>
-          <pc:sldMk cId="3541545579" sldId="320"/>
-        </pc:sldMkLst>
-        <pc:spChg chg="mod">
-          <ac:chgData name="Eder Silva" userId="9b7f41b4-798d-40cf-8f87-8e33ae7a0417" providerId="ADAL" clId="{DFF9E84E-5922-4F26-9EAD-8AB4E668133E}" dt="2026-10-27T14:37:57.962" v="365" actId="20577"/>
-          <ac:spMkLst>
-            <pc:docMk/>
-            <pc:sldMk cId="3541545579" sldId="320"/>
-            <ac:spMk id="3" creationId="{00000000-0000-0000-0000-000000000000}"/>
-          </ac:spMkLst>
-        </pc:spChg>
-        <pc:spChg chg="mod">
-          <ac:chgData name="Eder Silva" userId="9b7f41b4-798d-40cf-8f87-8e33ae7a0417" providerId="ADAL" clId="{DFF9E84E-5922-4F26-9EAD-8AB4E668133E}" dt="2026-10-27T14:37:58.232" v="371" actId="947"/>
-          <ac:spMkLst>
-            <pc:docMk/>
-            <pc:sldMk cId="3541545579" sldId="320"/>
-            <ac:spMk id="5" creationId="{00000000-0000-0000-0000-000000000000}"/>
-          </ac:spMkLst>
-        </pc:spChg>
-        <pc:spChg chg="mod">
-          <ac:chgData name="Eder Silva" userId="9b7f41b4-798d-40cf-8f87-8e33ae7a0417" providerId="ADAL" clId="{DFF9E84E-5922-4F26-9EAD-8AB4E668133E}" dt="2026-10-27T14:37:58.236" v="372" actId="947"/>
-          <ac:spMkLst>
-            <pc:docMk/>
-            <pc:sldMk cId="3541545579" sldId="320"/>
-            <ac:spMk id="7" creationId="{00000000-0000-0000-0000-000000000000}"/>
-          </ac:spMkLst>
-        </pc:spChg>
-        <pc:spChg chg="mod">
-          <ac:chgData name="Eder Silva" userId="9b7f41b4-798d-40cf-8f87-8e33ae7a0417" providerId="ADAL" clId="{DFF9E84E-5922-4F26-9EAD-8AB4E668133E}" dt="2026-10-27T14:37:58.240" v="373" actId="947"/>
-          <ac:spMkLst>
-            <pc:docMk/>
-            <pc:sldMk cId="3541545579" sldId="320"/>
-            <ac:spMk id="9" creationId="{00000000-0000-0000-0000-000000000000}"/>
-          </ac:spMkLst>
-        </pc:spChg>
-        <pc:spChg chg="mod">
-          <ac:chgData name="Eder Silva" userId="9b7f41b4-798d-40cf-8f87-8e33ae7a0417" providerId="ADAL" clId="{DFF9E84E-5922-4F26-9EAD-8AB4E668133E}" dt="2026-10-27T14:37:58.246" v="374" actId="947"/>
-          <ac:spMkLst>
-            <pc:docMk/>
-            <pc:sldMk cId="3541545579" sldId="320"/>
-            <ac:spMk id="11" creationId="{00000000-0000-0000-0000-000000000000}"/>
-          </ac:spMkLst>
-        </pc:spChg>
-        <pc:spChg chg="mod">
-          <ac:chgData name="Eder Silva" userId="9b7f41b4-798d-40cf-8f87-8e33ae7a0417" providerId="ADAL" clId="{DFF9E84E-5922-4F26-9EAD-8AB4E668133E}" dt="2026-10-27T14:37:58.252" v="375" actId="947"/>
-          <ac:spMkLst>
-            <pc:docMk/>
-            <pc:sldMk cId="3541545579" sldId="320"/>
-            <ac:spMk id="13" creationId="{00000000-0000-0000-0000-000000000000}"/>
-          </ac:spMkLst>
-        </pc:spChg>
-        <pc:spChg chg="mod">
-          <ac:chgData name="Eder Silva" userId="9b7f41b4-798d-40cf-8f87-8e33ae7a0417" providerId="ADAL" clId="{DFF9E84E-5922-4F26-9EAD-8AB4E668133E}" dt="2026-10-27T15:51:22.534" v="852" actId="947"/>
-          <ac:spMkLst>
-            <pc:docMk/>
-            <pc:sldMk cId="3541545579" sldId="320"/>
-            <ac:spMk id="14" creationId="{00000000-0000-0000-0000-000000000000}"/>
-          </ac:spMkLst>
-        </pc:spChg>
-      </pc:sldChg>
-      <pc:sldChg chg="modSp add del mod ord modNotes">
-        <pc:chgData name="Eder Silva" userId="9b7f41b4-798d-40cf-8f87-8e33ae7a0417" providerId="ADAL" clId="{DFF9E84E-5922-4F26-9EAD-8AB4E668133E}" dt="2026-10-27T20:24:35.739" v="1711" actId="2696"/>
-        <pc:sldMkLst>
-          <pc:docMk/>
-          <pc:sldMk cId="2086514603" sldId="321"/>
-        </pc:sldMkLst>
-        <pc:spChg chg="mod">
-          <ac:chgData name="Eder Silva" userId="9b7f41b4-798d-40cf-8f87-8e33ae7a0417" providerId="ADAL" clId="{DFF9E84E-5922-4F26-9EAD-8AB4E668133E}" dt="2026-10-27T14:37:58.286" v="381" actId="20577"/>
-          <ac:spMkLst>
-            <pc:docMk/>
-            <pc:sldMk cId="2086514603" sldId="321"/>
-            <ac:spMk id="2" creationId="{00000000-0000-0000-0000-000000000000}"/>
-          </ac:spMkLst>
-        </pc:spChg>
-        <pc:spChg chg="mod">
-          <ac:chgData name="Eder Silva" userId="9b7f41b4-798d-40cf-8f87-8e33ae7a0417" providerId="ADAL" clId="{DFF9E84E-5922-4F26-9EAD-8AB4E668133E}" dt="2026-10-27T14:37:58.291" v="382" actId="20577"/>
-          <ac:spMkLst>
-            <pc:docMk/>
-            <pc:sldMk cId="2086514603" sldId="321"/>
-            <ac:spMk id="3" creationId="{00000000-0000-0000-0000-000000000000}"/>
-          </ac:spMkLst>
-        </pc:spChg>
-      </pc:sldChg>
-      <pc:sldChg chg="modSp add del mod ord modNotes">
-        <pc:chgData name="Eder Silva" userId="9b7f41b4-798d-40cf-8f87-8e33ae7a0417" providerId="ADAL" clId="{DFF9E84E-5922-4F26-9EAD-8AB4E668133E}" dt="2026-10-27T20:24:35.737" v="1710" actId="2696"/>
-        <pc:sldMkLst>
-          <pc:docMk/>
-          <pc:sldMk cId="3875413146" sldId="322"/>
-        </pc:sldMkLst>
-        <pc:spChg chg="mod">
-          <ac:chgData name="Eder Silva" userId="9b7f41b4-798d-40cf-8f87-8e33ae7a0417" providerId="ADAL" clId="{DFF9E84E-5922-4F26-9EAD-8AB4E668133E}" dt="2026-10-27T14:37:58.385" v="387" actId="20577"/>
-          <ac:spMkLst>
-            <pc:docMk/>
-            <pc:sldMk cId="3875413146" sldId="322"/>
-            <ac:spMk id="3" creationId="{00000000-0000-0000-0000-000000000000}"/>
-          </ac:spMkLst>
-        </pc:spChg>
-        <pc:spChg chg="mod">
-          <ac:chgData name="Eder Silva" userId="9b7f41b4-798d-40cf-8f87-8e33ae7a0417" providerId="ADAL" clId="{DFF9E84E-5922-4F26-9EAD-8AB4E668133E}" dt="2026-10-27T14:37:58.391" v="388" actId="20577"/>
-          <ac:spMkLst>
-            <pc:docMk/>
-            <pc:sldMk cId="3875413146" sldId="322"/>
-            <ac:spMk id="4" creationId="{00000000-0000-0000-0000-000000000000}"/>
-          </ac:spMkLst>
-        </pc:spChg>
-        <pc:spChg chg="mod">
-          <ac:chgData name="Eder Silva" userId="9b7f41b4-798d-40cf-8f87-8e33ae7a0417" providerId="ADAL" clId="{DFF9E84E-5922-4F26-9EAD-8AB4E668133E}" dt="2026-10-27T15:51:22.637" v="868" actId="947"/>
-          <ac:spMkLst>
-            <pc:docMk/>
-            <pc:sldMk cId="3875413146" sldId="322"/>
-            <ac:spMk id="6" creationId="{00000000-0000-0000-0000-000000000000}"/>
-          </ac:spMkLst>
-        </pc:spChg>
-      </pc:sldChg>
-      <pc:sldChg chg="modSp add del mod ord modNotes">
-        <pc:chgData name="Eder Silva" userId="9b7f41b4-798d-40cf-8f87-8e33ae7a0417" providerId="ADAL" clId="{DFF9E84E-5922-4F26-9EAD-8AB4E668133E}" dt="2026-10-27T20:24:35.735" v="1709" actId="2696"/>
-        <pc:sldMkLst>
-          <pc:docMk/>
-          <pc:sldMk cId="435937012" sldId="323"/>
-        </pc:sldMkLst>
-        <pc:spChg chg="mod">
-          <ac:chgData name="Eder Silva" userId="9b7f41b4-798d-40cf-8f87-8e33ae7a0417" providerId="ADAL" clId="{DFF9E84E-5922-4F26-9EAD-8AB4E668133E}" dt="2026-10-27T14:37:58.443" v="394" actId="20577"/>
-          <ac:spMkLst>
-            <pc:docMk/>
-            <pc:sldMk cId="435937012" sldId="323"/>
-            <ac:spMk id="3" creationId="{00000000-0000-0000-0000-000000000000}"/>
-          </ac:spMkLst>
-        </pc:spChg>
-        <pc:spChg chg="mod">
-          <ac:chgData name="Eder Silva" userId="9b7f41b4-798d-40cf-8f87-8e33ae7a0417" providerId="ADAL" clId="{DFF9E84E-5922-4F26-9EAD-8AB4E668133E}" dt="2026-10-27T14:37:58.704" v="400" actId="947"/>
-          <ac:spMkLst>
-            <pc:docMk/>
-            <pc:sldMk cId="435937012" sldId="323"/>
-            <ac:spMk id="5" creationId="{00000000-0000-0000-0000-000000000000}"/>
-          </ac:spMkLst>
-        </pc:spChg>
-        <pc:spChg chg="mod">
-          <ac:chgData name="Eder Silva" userId="9b7f41b4-798d-40cf-8f87-8e33ae7a0417" providerId="ADAL" clId="{DFF9E84E-5922-4F26-9EAD-8AB4E668133E}" dt="2026-10-27T14:37:58.708" v="401" actId="947"/>
-          <ac:spMkLst>
-            <pc:docMk/>
-            <pc:sldMk cId="435937012" sldId="323"/>
-            <ac:spMk id="7" creationId="{00000000-0000-0000-0000-000000000000}"/>
-          </ac:spMkLst>
-        </pc:spChg>
-        <pc:spChg chg="mod">
-          <ac:chgData name="Eder Silva" userId="9b7f41b4-798d-40cf-8f87-8e33ae7a0417" providerId="ADAL" clId="{DFF9E84E-5922-4F26-9EAD-8AB4E668133E}" dt="2026-10-27T14:37:58.714" v="402" actId="947"/>
-          <ac:spMkLst>
-            <pc:docMk/>
-            <pc:sldMk cId="435937012" sldId="323"/>
-            <ac:spMk id="9" creationId="{00000000-0000-0000-0000-000000000000}"/>
-          </ac:spMkLst>
-        </pc:spChg>
-        <pc:spChg chg="mod">
-          <ac:chgData name="Eder Silva" userId="9b7f41b4-798d-40cf-8f87-8e33ae7a0417" providerId="ADAL" clId="{DFF9E84E-5922-4F26-9EAD-8AB4E668133E}" dt="2026-10-27T14:37:58.718" v="403" actId="947"/>
-          <ac:spMkLst>
-            <pc:docMk/>
-            <pc:sldMk cId="435937012" sldId="323"/>
-            <ac:spMk id="11" creationId="{00000000-0000-0000-0000-000000000000}"/>
-          </ac:spMkLst>
-        </pc:spChg>
-        <pc:spChg chg="mod">
-          <ac:chgData name="Eder Silva" userId="9b7f41b4-798d-40cf-8f87-8e33ae7a0417" providerId="ADAL" clId="{DFF9E84E-5922-4F26-9EAD-8AB4E668133E}" dt="2026-10-27T14:37:58.722" v="404" actId="947"/>
-          <ac:spMkLst>
-            <pc:docMk/>
-            <pc:sldMk cId="435937012" sldId="323"/>
-            <ac:spMk id="13" creationId="{00000000-0000-0000-0000-000000000000}"/>
-          </ac:spMkLst>
-        </pc:spChg>
-        <pc:spChg chg="mod">
-          <ac:chgData name="Eder Silva" userId="9b7f41b4-798d-40cf-8f87-8e33ae7a0417" providerId="ADAL" clId="{DFF9E84E-5922-4F26-9EAD-8AB4E668133E}" dt="2026-10-27T15:51:22.883" v="900" actId="947"/>
-          <ac:spMkLst>
-            <pc:docMk/>
-            <pc:sldMk cId="435937012" sldId="323"/>
-            <ac:spMk id="14" creationId="{00000000-0000-0000-0000-000000000000}"/>
-          </ac:spMkLst>
-        </pc:spChg>
-      </pc:sldChg>
-      <pc:sldChg chg="modSp add del mod ord modNotes">
-        <pc:chgData name="Eder Silva" userId="9b7f41b4-798d-40cf-8f87-8e33ae7a0417" providerId="ADAL" clId="{DFF9E84E-5922-4F26-9EAD-8AB4E668133E}" dt="2026-10-27T20:24:35.732" v="1708" actId="2696"/>
-        <pc:sldMkLst>
-          <pc:docMk/>
-          <pc:sldMk cId="4134965757" sldId="324"/>
-        </pc:sldMkLst>
-        <pc:spChg chg="mod">
-          <ac:chgData name="Eder Silva" userId="9b7f41b4-798d-40cf-8f87-8e33ae7a0417" providerId="ADAL" clId="{DFF9E84E-5922-4F26-9EAD-8AB4E668133E}" dt="2026-10-27T14:37:58.771" v="410" actId="20577"/>
-          <ac:spMkLst>
-            <pc:docMk/>
-            <pc:sldMk cId="4134965757" sldId="324"/>
-            <ac:spMk id="3" creationId="{00000000-0000-0000-0000-000000000000}"/>
-          </ac:spMkLst>
-        </pc:spChg>
-        <pc:spChg chg="mod">
-          <ac:chgData name="Eder Silva" userId="9b7f41b4-798d-40cf-8f87-8e33ae7a0417" providerId="ADAL" clId="{DFF9E84E-5922-4F26-9EAD-8AB4E668133E}" dt="2026-10-27T14:37:59.047" v="416" actId="947"/>
-          <ac:spMkLst>
-            <pc:docMk/>
-            <pc:sldMk cId="4134965757" sldId="324"/>
-            <ac:spMk id="5" creationId="{00000000-0000-0000-0000-000000000000}"/>
-          </ac:spMkLst>
-        </pc:spChg>
-        <pc:spChg chg="mod">
-          <ac:chgData name="Eder Silva" userId="9b7f41b4-798d-40cf-8f87-8e33ae7a0417" providerId="ADAL" clId="{DFF9E84E-5922-4F26-9EAD-8AB4E668133E}" dt="2026-10-27T14:37:59.052" v="417" actId="947"/>
-          <ac:spMkLst>
-            <pc:docMk/>
-            <pc:sldMk cId="4134965757" sldId="324"/>
-            <ac:spMk id="7" creationId="{00000000-0000-0000-0000-000000000000}"/>
-          </ac:spMkLst>
-        </pc:spChg>
-        <pc:spChg chg="mod">
-          <ac:chgData name="Eder Silva" userId="9b7f41b4-798d-40cf-8f87-8e33ae7a0417" providerId="ADAL" clId="{DFF9E84E-5922-4F26-9EAD-8AB4E668133E}" dt="2026-10-27T14:37:59.056" v="418" actId="947"/>
-          <ac:spMkLst>
-            <pc:docMk/>
-            <pc:sldMk cId="4134965757" sldId="324"/>
-            <ac:spMk id="9" creationId="{00000000-0000-0000-0000-000000000000}"/>
-          </ac:spMkLst>
-        </pc:spChg>
-        <pc:spChg chg="mod">
-          <ac:chgData name="Eder Silva" userId="9b7f41b4-798d-40cf-8f87-8e33ae7a0417" providerId="ADAL" clId="{DFF9E84E-5922-4F26-9EAD-8AB4E668133E}" dt="2026-10-27T14:37:59.060" v="419" actId="947"/>
-          <ac:spMkLst>
-            <pc:docMk/>
-            <pc:sldMk cId="4134965757" sldId="324"/>
-            <ac:spMk id="11" creationId="{00000000-0000-0000-0000-000000000000}"/>
-          </ac:spMkLst>
-        </pc:spChg>
-        <pc:spChg chg="mod">
-          <ac:chgData name="Eder Silva" userId="9b7f41b4-798d-40cf-8f87-8e33ae7a0417" providerId="ADAL" clId="{DFF9E84E-5922-4F26-9EAD-8AB4E668133E}" dt="2026-10-27T14:37:59.064" v="420" actId="947"/>
-          <ac:spMkLst>
-            <pc:docMk/>
-            <pc:sldMk cId="4134965757" sldId="324"/>
-            <ac:spMk id="13" creationId="{00000000-0000-0000-0000-000000000000}"/>
-          </ac:spMkLst>
-        </pc:spChg>
-        <pc:spChg chg="mod">
-          <ac:chgData name="Eder Silva" userId="9b7f41b4-798d-40cf-8f87-8e33ae7a0417" providerId="ADAL" clId="{DFF9E84E-5922-4F26-9EAD-8AB4E668133E}" dt="2026-10-27T15:51:23.182" v="928" actId="947"/>
-          <ac:spMkLst>
-            <pc:docMk/>
-            <pc:sldMk cId="4134965757" sldId="324"/>
-            <ac:spMk id="14" creationId="{00000000-0000-0000-0000-000000000000}"/>
-          </ac:spMkLst>
-        </pc:spChg>
-      </pc:sldChg>
-      <pc:sldChg chg="modSp add del mod ord modNotes">
-        <pc:chgData name="Eder Silva" userId="9b7f41b4-798d-40cf-8f87-8e33ae7a0417" providerId="ADAL" clId="{DFF9E84E-5922-4F26-9EAD-8AB4E668133E}" dt="2026-10-27T20:24:35.728" v="1707" actId="2696"/>
-        <pc:sldMkLst>
-          <pc:docMk/>
-          <pc:sldMk cId="806181153" sldId="325"/>
-        </pc:sldMkLst>
-        <pc:spChg chg="mod">
-          <ac:chgData name="Eder Silva" userId="9b7f41b4-798d-40cf-8f87-8e33ae7a0417" providerId="ADAL" clId="{DFF9E84E-5922-4F26-9EAD-8AB4E668133E}" dt="2026-10-27T14:37:59.108" v="426" actId="20577"/>
-          <ac:spMkLst>
-            <pc:docMk/>
-            <pc:sldMk cId="806181153" sldId="325"/>
-            <ac:spMk id="3" creationId="{00000000-0000-0000-0000-000000000000}"/>
-          </ac:spMkLst>
-        </pc:spChg>
-        <pc:spChg chg="mod">
-          <ac:chgData name="Eder Silva" userId="9b7f41b4-798d-40cf-8f87-8e33ae7a0417" providerId="ADAL" clId="{DFF9E84E-5922-4F26-9EAD-8AB4E668133E}" dt="2026-10-27T14:37:59.115" v="427" actId="20577"/>
-          <ac:spMkLst>
-            <pc:docMk/>
-            <pc:sldMk cId="806181153" sldId="325"/>
-            <ac:spMk id="4" creationId="{00000000-0000-0000-0000-000000000000}"/>
-          </ac:spMkLst>
-        </pc:spChg>
-        <pc:spChg chg="mod">
-          <ac:chgData name="Eder Silva" userId="9b7f41b4-798d-40cf-8f87-8e33ae7a0417" providerId="ADAL" clId="{DFF9E84E-5922-4F26-9EAD-8AB4E668133E}" dt="2026-10-27T15:51:23.381" v="952" actId="947"/>
-          <ac:spMkLst>
-            <pc:docMk/>
-            <pc:sldMk cId="806181153" sldId="325"/>
-            <ac:spMk id="6" creationId="{00000000-0000-0000-0000-000000000000}"/>
-          </ac:spMkLst>
-        </pc:spChg>
-      </pc:sldChg>
-      <pc:sldChg chg="modSp add del mod ord modNotes">
-        <pc:chgData name="Eder Silva" userId="9b7f41b4-798d-40cf-8f87-8e33ae7a0417" providerId="ADAL" clId="{DFF9E84E-5922-4F26-9EAD-8AB4E668133E}" dt="2026-10-27T20:24:35.726" v="1706" actId="2696"/>
-        <pc:sldMkLst>
-          <pc:docMk/>
-          <pc:sldMk cId="1302568435" sldId="326"/>
-        </pc:sldMkLst>
-        <pc:spChg chg="mod">
-          <ac:chgData name="Eder Silva" userId="9b7f41b4-798d-40cf-8f87-8e33ae7a0417" providerId="ADAL" clId="{DFF9E84E-5922-4F26-9EAD-8AB4E668133E}" dt="2026-10-27T14:37:59.167" v="433" actId="20577"/>
-          <ac:spMkLst>
-            <pc:docMk/>
-            <pc:sldMk cId="1302568435" sldId="326"/>
-            <ac:spMk id="3" creationId="{00000000-0000-0000-0000-000000000000}"/>
-          </ac:spMkLst>
-        </pc:spChg>
-        <pc:spChg chg="mod">
-          <ac:chgData name="Eder Silva" userId="9b7f41b4-798d-40cf-8f87-8e33ae7a0417" providerId="ADAL" clId="{DFF9E84E-5922-4F26-9EAD-8AB4E668133E}" dt="2026-10-27T14:37:59.423" v="439" actId="947"/>
-          <ac:spMkLst>
-            <pc:docMk/>
-            <pc:sldMk cId="1302568435" sldId="326"/>
-            <ac:spMk id="5" creationId="{00000000-0000-0000-0000-000000000000}"/>
-          </ac:spMkLst>
-        </pc:spChg>
-        <pc:spChg chg="mod">
-          <ac:chgData name="Eder Silva" userId="9b7f41b4-798d-40cf-8f87-8e33ae7a0417" providerId="ADAL" clId="{DFF9E84E-5922-4F26-9EAD-8AB4E668133E}" dt="2026-10-27T14:37:59.427" v="440" actId="947"/>
-          <ac:spMkLst>
-            <pc:docMk/>
-            <pc:sldMk cId="1302568435" sldId="326"/>
-            <ac:spMk id="7" creationId="{00000000-0000-0000-0000-000000000000}"/>
-          </ac:spMkLst>
-        </pc:spChg>
-        <pc:spChg chg="mod">
-          <ac:chgData name="Eder Silva" userId="9b7f41b4-798d-40cf-8f87-8e33ae7a0417" providerId="ADAL" clId="{DFF9E84E-5922-4F26-9EAD-8AB4E668133E}" dt="2026-10-27T14:37:59.431" v="441" actId="947"/>
-          <ac:spMkLst>
-            <pc:docMk/>
-            <pc:sldMk cId="1302568435" sldId="326"/>
-            <ac:spMk id="9" creationId="{00000000-0000-0000-0000-000000000000}"/>
-          </ac:spMkLst>
-        </pc:spChg>
-        <pc:spChg chg="mod">
-          <ac:chgData name="Eder Silva" userId="9b7f41b4-798d-40cf-8f87-8e33ae7a0417" providerId="ADAL" clId="{DFF9E84E-5922-4F26-9EAD-8AB4E668133E}" dt="2026-10-27T14:37:59.435" v="442" actId="947"/>
-          <ac:spMkLst>
-            <pc:docMk/>
-            <pc:sldMk cId="1302568435" sldId="326"/>
-            <ac:spMk id="11" creationId="{00000000-0000-0000-0000-000000000000}"/>
-          </ac:spMkLst>
-        </pc:spChg>
-        <pc:spChg chg="mod">
-          <ac:chgData name="Eder Silva" userId="9b7f41b4-798d-40cf-8f87-8e33ae7a0417" providerId="ADAL" clId="{DFF9E84E-5922-4F26-9EAD-8AB4E668133E}" dt="2026-10-27T14:37:59.440" v="443" actId="947"/>
-          <ac:spMkLst>
-            <pc:docMk/>
-            <pc:sldMk cId="1302568435" sldId="326"/>
-            <ac:spMk id="13" creationId="{00000000-0000-0000-0000-000000000000}"/>
-          </ac:spMkLst>
-        </pc:spChg>
-        <pc:spChg chg="mod">
-          <ac:chgData name="Eder Silva" userId="9b7f41b4-798d-40cf-8f87-8e33ae7a0417" providerId="ADAL" clId="{DFF9E84E-5922-4F26-9EAD-8AB4E668133E}" dt="2026-10-27T15:51:23.579" v="976" actId="947"/>
-          <ac:spMkLst>
-            <pc:docMk/>
-            <pc:sldMk cId="1302568435" sldId="326"/>
-            <ac:spMk id="14" creationId="{00000000-0000-0000-0000-000000000000}"/>
-          </ac:spMkLst>
-        </pc:spChg>
-      </pc:sldChg>
-      <pc:sldChg chg="modSp add del mod ord modNotes">
-        <pc:chgData name="Eder Silva" userId="9b7f41b4-798d-40cf-8f87-8e33ae7a0417" providerId="ADAL" clId="{DFF9E84E-5922-4F26-9EAD-8AB4E668133E}" dt="2026-10-27T20:24:35.724" v="1705" actId="2696"/>
-        <pc:sldMkLst>
-          <pc:docMk/>
-          <pc:sldMk cId="1362159032" sldId="327"/>
-        </pc:sldMkLst>
-        <pc:spChg chg="mod">
-          <ac:chgData name="Eder Silva" userId="9b7f41b4-798d-40cf-8f87-8e33ae7a0417" providerId="ADAL" clId="{DFF9E84E-5922-4F26-9EAD-8AB4E668133E}" dt="2026-10-27T14:37:59.493" v="449" actId="20577"/>
-          <ac:spMkLst>
-            <pc:docMk/>
-            <pc:sldMk cId="1362159032" sldId="327"/>
-            <ac:spMk id="3" creationId="{00000000-0000-0000-0000-000000000000}"/>
-          </ac:spMkLst>
-        </pc:spChg>
-        <pc:spChg chg="mod">
-          <ac:chgData name="Eder Silva" userId="9b7f41b4-798d-40cf-8f87-8e33ae7a0417" providerId="ADAL" clId="{DFF9E84E-5922-4F26-9EAD-8AB4E668133E}" dt="2026-10-27T14:37:59.744" v="455" actId="947"/>
-          <ac:spMkLst>
-            <pc:docMk/>
-            <pc:sldMk cId="1362159032" sldId="327"/>
-            <ac:spMk id="5" creationId="{00000000-0000-0000-0000-000000000000}"/>
-          </ac:spMkLst>
-        </pc:spChg>
-        <pc:spChg chg="mod">
-          <ac:chgData name="Eder Silva" userId="9b7f41b4-798d-40cf-8f87-8e33ae7a0417" providerId="ADAL" clId="{DFF9E84E-5922-4F26-9EAD-8AB4E668133E}" dt="2026-10-27T14:37:59.748" v="456" actId="947"/>
-          <ac:spMkLst>
-            <pc:docMk/>
-            <pc:sldMk cId="1362159032" sldId="327"/>
-            <ac:spMk id="7" creationId="{00000000-0000-0000-0000-000000000000}"/>
-          </ac:spMkLst>
-        </pc:spChg>
-        <pc:spChg chg="mod">
-          <ac:chgData name="Eder Silva" userId="9b7f41b4-798d-40cf-8f87-8e33ae7a0417" providerId="ADAL" clId="{DFF9E84E-5922-4F26-9EAD-8AB4E668133E}" dt="2026-10-27T14:37:59.751" v="457" actId="947"/>
-          <ac:spMkLst>
-            <pc:docMk/>
-            <pc:sldMk cId="1362159032" sldId="327"/>
-            <ac:spMk id="9" creationId="{00000000-0000-0000-0000-000000000000}"/>
-          </ac:spMkLst>
-        </pc:spChg>
-        <pc:spChg chg="mod">
-          <ac:chgData name="Eder Silva" userId="9b7f41b4-798d-40cf-8f87-8e33ae7a0417" providerId="ADAL" clId="{DFF9E84E-5922-4F26-9EAD-8AB4E668133E}" dt="2026-10-27T14:37:59.755" v="458" actId="947"/>
-          <ac:spMkLst>
-            <pc:docMk/>
-            <pc:sldMk cId="1362159032" sldId="327"/>
-            <ac:spMk id="11" creationId="{00000000-0000-0000-0000-000000000000}"/>
-          </ac:spMkLst>
-        </pc:spChg>
-        <pc:spChg chg="mod">
-          <ac:chgData name="Eder Silva" userId="9b7f41b4-798d-40cf-8f87-8e33ae7a0417" providerId="ADAL" clId="{DFF9E84E-5922-4F26-9EAD-8AB4E668133E}" dt="2026-10-27T14:37:59.758" v="459" actId="947"/>
-          <ac:spMkLst>
-            <pc:docMk/>
-            <pc:sldMk cId="1362159032" sldId="327"/>
-            <ac:spMk id="13" creationId="{00000000-0000-0000-0000-000000000000}"/>
-          </ac:spMkLst>
-        </pc:spChg>
-        <pc:spChg chg="mod">
-          <ac:chgData name="Eder Silva" userId="9b7f41b4-798d-40cf-8f87-8e33ae7a0417" providerId="ADAL" clId="{DFF9E84E-5922-4F26-9EAD-8AB4E668133E}" dt="2026-10-27T15:51:23.792" v="1000" actId="947"/>
-          <ac:spMkLst>
-            <pc:docMk/>
-            <pc:sldMk cId="1362159032" sldId="327"/>
-            <ac:spMk id="14" creationId="{00000000-0000-0000-0000-000000000000}"/>
-          </ac:spMkLst>
-        </pc:spChg>
-      </pc:sldChg>
-      <pc:sldChg chg="modSp add del mod ord modNotes">
-        <pc:chgData name="Eder Silva" userId="9b7f41b4-798d-40cf-8f87-8e33ae7a0417" providerId="ADAL" clId="{DFF9E84E-5922-4F26-9EAD-8AB4E668133E}" dt="2026-10-27T20:24:35.722" v="1704" actId="2696"/>
-        <pc:sldMkLst>
-          <pc:docMk/>
-          <pc:sldMk cId="2563819876" sldId="328"/>
-        </pc:sldMkLst>
-        <pc:spChg chg="mod">
-          <ac:chgData name="Eder Silva" userId="9b7f41b4-798d-40cf-8f87-8e33ae7a0417" providerId="ADAL" clId="{DFF9E84E-5922-4F26-9EAD-8AB4E668133E}" dt="2026-10-27T14:37:59.815" v="466" actId="20577"/>
-          <ac:spMkLst>
-            <pc:docMk/>
-            <pc:sldMk cId="2563819876" sldId="328"/>
-            <ac:spMk id="3" creationId="{00000000-0000-0000-0000-000000000000}"/>
-          </ac:spMkLst>
-        </pc:spChg>
-        <pc:spChg chg="mod">
-          <ac:chgData name="Eder Silva" userId="9b7f41b4-798d-40cf-8f87-8e33ae7a0417" providerId="ADAL" clId="{DFF9E84E-5922-4F26-9EAD-8AB4E668133E}" dt="2026-10-27T14:38:00.024" v="471" actId="947"/>
-          <ac:spMkLst>
-            <pc:docMk/>
-            <pc:sldMk cId="2563819876" sldId="328"/>
-            <ac:spMk id="5" creationId="{00000000-0000-0000-0000-000000000000}"/>
-          </ac:spMkLst>
-        </pc:spChg>
-        <pc:spChg chg="mod">
-          <ac:chgData name="Eder Silva" userId="9b7f41b4-798d-40cf-8f87-8e33ae7a0417" providerId="ADAL" clId="{DFF9E84E-5922-4F26-9EAD-8AB4E668133E}" dt="2026-10-27T14:38:00.028" v="472" actId="947"/>
-          <ac:spMkLst>
-            <pc:docMk/>
-            <pc:sldMk cId="2563819876" sldId="328"/>
-            <ac:spMk id="7" creationId="{00000000-0000-0000-0000-000000000000}"/>
-          </ac:spMkLst>
-        </pc:spChg>
-        <pc:spChg chg="mod">
-          <ac:chgData name="Eder Silva" userId="9b7f41b4-798d-40cf-8f87-8e33ae7a0417" providerId="ADAL" clId="{DFF9E84E-5922-4F26-9EAD-8AB4E668133E}" dt="2026-10-27T14:38:00.033" v="473" actId="947"/>
-          <ac:spMkLst>
-            <pc:docMk/>
-            <pc:sldMk cId="2563819876" sldId="328"/>
-            <ac:spMk id="9" creationId="{00000000-0000-0000-0000-000000000000}"/>
-          </ac:spMkLst>
-        </pc:spChg>
-        <pc:spChg chg="mod">
-          <ac:chgData name="Eder Silva" userId="9b7f41b4-798d-40cf-8f87-8e33ae7a0417" providerId="ADAL" clId="{DFF9E84E-5922-4F26-9EAD-8AB4E668133E}" dt="2026-10-27T14:38:00.037" v="474" actId="947"/>
-          <ac:spMkLst>
-            <pc:docMk/>
-            <pc:sldMk cId="2563819876" sldId="328"/>
-            <ac:spMk id="11" creationId="{00000000-0000-0000-0000-000000000000}"/>
-          </ac:spMkLst>
-        </pc:spChg>
-        <pc:spChg chg="mod">
-          <ac:chgData name="Eder Silva" userId="9b7f41b4-798d-40cf-8f87-8e33ae7a0417" providerId="ADAL" clId="{DFF9E84E-5922-4F26-9EAD-8AB4E668133E}" dt="2026-10-27T15:51:23.944" v="1016" actId="947"/>
-          <ac:spMkLst>
-            <pc:docMk/>
-            <pc:sldMk cId="2563819876" sldId="328"/>
-            <ac:spMk id="12" creationId="{00000000-0000-0000-0000-000000000000}"/>
-          </ac:spMkLst>
-        </pc:spChg>
-      </pc:sldChg>
-      <pc:sldChg chg="add del setBg">
-        <pc:chgData name="Eder Silva" userId="9b7f41b4-798d-40cf-8f87-8e33ae7a0417" providerId="ADAL" clId="{DFF9E84E-5922-4F26-9EAD-8AB4E668133E}" dt="2026-10-27T15:46:04.980" v="526" actId="2696"/>
-        <pc:sldMkLst>
-          <pc:docMk/>
-          <pc:sldMk cId="2160500432" sldId="329"/>
-        </pc:sldMkLst>
-      </pc:sldChg>
-      <pc:sldChg chg="delSp modSp add del mod ord">
-        <pc:chgData name="Eder Silva" userId="9b7f41b4-798d-40cf-8f87-8e33ae7a0417" providerId="ADAL" clId="{DFF9E84E-5922-4F26-9EAD-8AB4E668133E}" dt="2026-10-27T20:24:35.719" v="1703" actId="2696"/>
-        <pc:sldMkLst>
-          <pc:docMk/>
-          <pc:sldMk cId="1572339491" sldId="330"/>
-        </pc:sldMkLst>
-        <pc:spChg chg="mod">
-          <ac:chgData name="Eder Silva" userId="9b7f41b4-798d-40cf-8f87-8e33ae7a0417" providerId="ADAL" clId="{DFF9E84E-5922-4F26-9EAD-8AB4E668133E}" dt="2026-10-27T15:46:11.255" v="538" actId="20577"/>
-          <ac:spMkLst>
-            <pc:docMk/>
-            <pc:sldMk cId="1572339491" sldId="330"/>
-            <ac:spMk id="2" creationId="{380E321C-959F-3B44-70F3-8955CAC832D4}"/>
-          </ac:spMkLst>
-        </pc:spChg>
-        <pc:spChg chg="del mod">
-          <ac:chgData name="Eder Silva" userId="9b7f41b4-798d-40cf-8f87-8e33ae7a0417" providerId="ADAL" clId="{DFF9E84E-5922-4F26-9EAD-8AB4E668133E}" dt="2026-10-27T15:46:21.783" v="542"/>
-          <ac:spMkLst>
-            <pc:docMk/>
-            <pc:sldMk cId="1572339491" sldId="330"/>
-            <ac:spMk id="3" creationId="{BD486FB5-1563-997F-038F-B4B4AC645990}"/>
-          </ac:spMkLst>
-        </pc:spChg>
-      </pc:sldChg>
       <pc:sldChg chg="modSp mod">
         <pc:chgData name="Eder Silva" userId="9b7f41b4-798d-40cf-8f87-8e33ae7a0417" providerId="ADAL" clId="{DFF9E84E-5922-4F26-9EAD-8AB4E668133E}" dt="2026-10-27T20:29:48.987" v="1741" actId="1076"/>
         <pc:sldMkLst>
@@ -2183,6 +298,21 @@
         </pc:spChg>
       </pc:sldChg>
       <pc:sldChg chg="modSp mod">
+        <pc:chgData name="Eder Silva" userId="9b7f41b4-798d-40cf-8f87-8e33ae7a0417" providerId="ADAL" clId="{DFF9E84E-5922-4F26-9EAD-8AB4E668133E}" dt="2026-10-30T20:29:33.176" v="1877" actId="1076"/>
+        <pc:sldMkLst>
+          <pc:docMk/>
+          <pc:sldMk cId="3369215739" sldId="343"/>
+        </pc:sldMkLst>
+        <pc:spChg chg="mod">
+          <ac:chgData name="Eder Silva" userId="9b7f41b4-798d-40cf-8f87-8e33ae7a0417" providerId="ADAL" clId="{DFF9E84E-5922-4F26-9EAD-8AB4E668133E}" dt="2026-10-30T20:29:33.176" v="1877" actId="1076"/>
+          <ac:spMkLst>
+            <pc:docMk/>
+            <pc:sldMk cId="3369215739" sldId="343"/>
+            <ac:spMk id="2" creationId="{00000000-0000-0000-0000-000000000000}"/>
+          </ac:spMkLst>
+        </pc:spChg>
+      </pc:sldChg>
+      <pc:sldChg chg="modSp mod">
         <pc:chgData name="Eder Silva" userId="9b7f41b4-798d-40cf-8f87-8e33ae7a0417" providerId="ADAL" clId="{DFF9E84E-5922-4F26-9EAD-8AB4E668133E}" dt="2026-10-27T20:31:36.964" v="1873" actId="14100"/>
         <pc:sldMkLst>
           <pc:docMk/>
@@ -2250,711 +380,6 @@
           </ac:spMkLst>
         </pc:spChg>
       </pc:sldChg>
-      <pc:sldChg chg="add del ord">
-        <pc:chgData name="Eder Silva" userId="9b7f41b4-798d-40cf-8f87-8e33ae7a0417" providerId="ADAL" clId="{DFF9E84E-5922-4F26-9EAD-8AB4E668133E}" dt="2026-10-27T20:29:04.539" v="1737" actId="47"/>
-        <pc:sldMkLst>
-          <pc:docMk/>
-          <pc:sldMk cId="3880002592" sldId="358"/>
-        </pc:sldMkLst>
-      </pc:sldChg>
-      <pc:sldChg chg="add del ord">
-        <pc:chgData name="Eder Silva" userId="9b7f41b4-798d-40cf-8f87-8e33ae7a0417" providerId="ADAL" clId="{DFF9E84E-5922-4F26-9EAD-8AB4E668133E}" dt="2026-10-27T20:29:04.539" v="1737" actId="47"/>
-        <pc:sldMkLst>
-          <pc:docMk/>
-          <pc:sldMk cId="1275154719" sldId="359"/>
-        </pc:sldMkLst>
-      </pc:sldChg>
-      <pc:sldChg chg="add del ord">
-        <pc:chgData name="Eder Silva" userId="9b7f41b4-798d-40cf-8f87-8e33ae7a0417" providerId="ADAL" clId="{DFF9E84E-5922-4F26-9EAD-8AB4E668133E}" dt="2026-10-27T20:29:04.539" v="1737" actId="47"/>
-        <pc:sldMkLst>
-          <pc:docMk/>
-          <pc:sldMk cId="3881610261" sldId="360"/>
-        </pc:sldMkLst>
-      </pc:sldChg>
-      <pc:sldChg chg="add del ord">
-        <pc:chgData name="Eder Silva" userId="9b7f41b4-798d-40cf-8f87-8e33ae7a0417" providerId="ADAL" clId="{DFF9E84E-5922-4F26-9EAD-8AB4E668133E}" dt="2026-10-27T20:29:04.539" v="1737" actId="47"/>
-        <pc:sldMkLst>
-          <pc:docMk/>
-          <pc:sldMk cId="2515349957" sldId="361"/>
-        </pc:sldMkLst>
-      </pc:sldChg>
-      <pc:sldChg chg="add del ord">
-        <pc:chgData name="Eder Silva" userId="9b7f41b4-798d-40cf-8f87-8e33ae7a0417" providerId="ADAL" clId="{DFF9E84E-5922-4F26-9EAD-8AB4E668133E}" dt="2026-10-27T20:29:04.539" v="1737" actId="47"/>
-        <pc:sldMkLst>
-          <pc:docMk/>
-          <pc:sldMk cId="3888067519" sldId="362"/>
-        </pc:sldMkLst>
-      </pc:sldChg>
-      <pc:sldChg chg="add del ord">
-        <pc:chgData name="Eder Silva" userId="9b7f41b4-798d-40cf-8f87-8e33ae7a0417" providerId="ADAL" clId="{DFF9E84E-5922-4F26-9EAD-8AB4E668133E}" dt="2026-10-27T20:29:04.539" v="1737" actId="47"/>
-        <pc:sldMkLst>
-          <pc:docMk/>
-          <pc:sldMk cId="576811957" sldId="363"/>
-        </pc:sldMkLst>
-      </pc:sldChg>
-      <pc:sldChg chg="add del ord">
-        <pc:chgData name="Eder Silva" userId="9b7f41b4-798d-40cf-8f87-8e33ae7a0417" providerId="ADAL" clId="{DFF9E84E-5922-4F26-9EAD-8AB4E668133E}" dt="2026-10-27T20:29:04.539" v="1737" actId="47"/>
-        <pc:sldMkLst>
-          <pc:docMk/>
-          <pc:sldMk cId="2812962666" sldId="364"/>
-        </pc:sldMkLst>
-      </pc:sldChg>
-      <pc:sldChg chg="addSp modSp add del mod ord modNotes">
-        <pc:chgData name="Eder Silva" userId="9b7f41b4-798d-40cf-8f87-8e33ae7a0417" providerId="ADAL" clId="{DFF9E84E-5922-4F26-9EAD-8AB4E668133E}" dt="2026-10-27T20:29:04.539" v="1737" actId="47"/>
-        <pc:sldMkLst>
-          <pc:docMk/>
-          <pc:sldMk cId="154061066" sldId="365"/>
-        </pc:sldMkLst>
-        <pc:spChg chg="mod">
-          <ac:chgData name="Eder Silva" userId="9b7f41b4-798d-40cf-8f87-8e33ae7a0417" providerId="ADAL" clId="{DFF9E84E-5922-4F26-9EAD-8AB4E668133E}" dt="2026-10-27T20:24:31.657" v="1045" actId="947"/>
-          <ac:spMkLst>
-            <pc:docMk/>
-            <pc:sldMk cId="154061066" sldId="365"/>
-            <ac:spMk id="2" creationId="{00000000-0000-0000-0000-000000000000}"/>
-          </ac:spMkLst>
-        </pc:spChg>
-        <pc:spChg chg="mod">
-          <ac:chgData name="Eder Silva" userId="9b7f41b4-798d-40cf-8f87-8e33ae7a0417" providerId="ADAL" clId="{DFF9E84E-5922-4F26-9EAD-8AB4E668133E}" dt="2026-10-27T20:24:31.929" v="1074"/>
-          <ac:spMkLst>
-            <pc:docMk/>
-            <pc:sldMk cId="154061066" sldId="365"/>
-            <ac:spMk id="4" creationId="{00000000-0000-0000-0000-000000000000}"/>
-          </ac:spMkLst>
-        </pc:spChg>
-        <pc:spChg chg="mod">
-          <ac:chgData name="Eder Silva" userId="9b7f41b4-798d-40cf-8f87-8e33ae7a0417" providerId="ADAL" clId="{DFF9E84E-5922-4F26-9EAD-8AB4E668133E}" dt="2026-10-27T20:24:31.905" v="1071" actId="947"/>
-          <ac:spMkLst>
-            <pc:docMk/>
-            <pc:sldMk cId="154061066" sldId="365"/>
-            <ac:spMk id="6" creationId="{00000000-0000-0000-0000-000000000000}"/>
-          </ac:spMkLst>
-        </pc:spChg>
-        <pc:spChg chg="add mod">
-          <ac:chgData name="Eder Silva" userId="9b7f41b4-798d-40cf-8f87-8e33ae7a0417" providerId="ADAL" clId="{DFF9E84E-5922-4F26-9EAD-8AB4E668133E}" dt="2026-10-27T20:24:32.166" v="1115" actId="947"/>
-          <ac:spMkLst>
-            <pc:docMk/>
-            <pc:sldMk cId="154061066" sldId="365"/>
-            <ac:spMk id="7" creationId="{5A3359FB-F8EE-4396-6269-B0D31C9BD9F4}"/>
-          </ac:spMkLst>
-        </pc:spChg>
-        <pc:picChg chg="mod">
-          <ac:chgData name="Eder Silva" userId="9b7f41b4-798d-40cf-8f87-8e33ae7a0417" providerId="ADAL" clId="{DFF9E84E-5922-4F26-9EAD-8AB4E668133E}" dt="2026-10-27T20:24:31.966" v="1081"/>
-          <ac:picMkLst>
-            <pc:docMk/>
-            <pc:sldMk cId="154061066" sldId="365"/>
-            <ac:picMk id="5" creationId="{00000000-0000-0000-0000-000000000000}"/>
-          </ac:picMkLst>
-        </pc:picChg>
-      </pc:sldChg>
-      <pc:sldChg chg="add del ord">
-        <pc:chgData name="Eder Silva" userId="9b7f41b4-798d-40cf-8f87-8e33ae7a0417" providerId="ADAL" clId="{DFF9E84E-5922-4F26-9EAD-8AB4E668133E}" dt="2026-10-27T20:29:04.539" v="1737" actId="47"/>
-        <pc:sldMkLst>
-          <pc:docMk/>
-          <pc:sldMk cId="3871497908" sldId="366"/>
-        </pc:sldMkLst>
-      </pc:sldChg>
-      <pc:sldChg chg="modSp add del mod ord modNotes">
-        <pc:chgData name="Eder Silva" userId="9b7f41b4-798d-40cf-8f87-8e33ae7a0417" providerId="ADAL" clId="{DFF9E84E-5922-4F26-9EAD-8AB4E668133E}" dt="2026-10-27T20:29:04.539" v="1737" actId="47"/>
-        <pc:sldMkLst>
-          <pc:docMk/>
-          <pc:sldMk cId="4038452469" sldId="367"/>
-        </pc:sldMkLst>
-        <pc:spChg chg="mod">
-          <ac:chgData name="Eder Silva" userId="9b7f41b4-798d-40cf-8f87-8e33ae7a0417" providerId="ADAL" clId="{DFF9E84E-5922-4F26-9EAD-8AB4E668133E}" dt="2026-10-27T20:24:32.285" v="1124" actId="947"/>
-          <ac:spMkLst>
-            <pc:docMk/>
-            <pc:sldMk cId="4038452469" sldId="367"/>
-            <ac:spMk id="2" creationId="{00000000-0000-0000-0000-000000000000}"/>
-          </ac:spMkLst>
-        </pc:spChg>
-        <pc:spChg chg="mod">
-          <ac:chgData name="Eder Silva" userId="9b7f41b4-798d-40cf-8f87-8e33ae7a0417" providerId="ADAL" clId="{DFF9E84E-5922-4F26-9EAD-8AB4E668133E}" dt="2026-10-27T20:24:32.772" v="1199" actId="947"/>
-          <ac:spMkLst>
-            <pc:docMk/>
-            <pc:sldMk cId="4038452469" sldId="367"/>
-            <ac:spMk id="5" creationId="{00000000-0000-0000-0000-000000000000}"/>
-          </ac:spMkLst>
-        </pc:spChg>
-        <pc:spChg chg="mod">
-          <ac:chgData name="Eder Silva" userId="9b7f41b4-798d-40cf-8f87-8e33ae7a0417" providerId="ADAL" clId="{DFF9E84E-5922-4F26-9EAD-8AB4E668133E}" dt="2026-10-27T20:24:32.778" v="1200" actId="947"/>
-          <ac:spMkLst>
-            <pc:docMk/>
-            <pc:sldMk cId="4038452469" sldId="367"/>
-            <ac:spMk id="7" creationId="{00000000-0000-0000-0000-000000000000}"/>
-          </ac:spMkLst>
-        </pc:spChg>
-        <pc:spChg chg="mod">
-          <ac:chgData name="Eder Silva" userId="9b7f41b4-798d-40cf-8f87-8e33ae7a0417" providerId="ADAL" clId="{DFF9E84E-5922-4F26-9EAD-8AB4E668133E}" dt="2026-10-27T20:24:32.781" v="1201" actId="947"/>
-          <ac:spMkLst>
-            <pc:docMk/>
-            <pc:sldMk cId="4038452469" sldId="367"/>
-            <ac:spMk id="9" creationId="{00000000-0000-0000-0000-000000000000}"/>
-          </ac:spMkLst>
-        </pc:spChg>
-        <pc:spChg chg="mod">
-          <ac:chgData name="Eder Silva" userId="9b7f41b4-798d-40cf-8f87-8e33ae7a0417" providerId="ADAL" clId="{DFF9E84E-5922-4F26-9EAD-8AB4E668133E}" dt="2026-10-27T20:24:32.785" v="1202" actId="947"/>
-          <ac:spMkLst>
-            <pc:docMk/>
-            <pc:sldMk cId="4038452469" sldId="367"/>
-            <ac:spMk id="11" creationId="{00000000-0000-0000-0000-000000000000}"/>
-          </ac:spMkLst>
-        </pc:spChg>
-        <pc:spChg chg="mod">
-          <ac:chgData name="Eder Silva" userId="9b7f41b4-798d-40cf-8f87-8e33ae7a0417" providerId="ADAL" clId="{DFF9E84E-5922-4F26-9EAD-8AB4E668133E}" dt="2026-10-27T20:24:32.436" v="1150" actId="947"/>
-          <ac:spMkLst>
-            <pc:docMk/>
-            <pc:sldMk cId="4038452469" sldId="367"/>
-            <ac:spMk id="12" creationId="{00000000-0000-0000-0000-000000000000}"/>
-          </ac:spMkLst>
-        </pc:spChg>
-      </pc:sldChg>
-      <pc:sldChg chg="modSp add del mod ord modNotes">
-        <pc:chgData name="Eder Silva" userId="9b7f41b4-798d-40cf-8f87-8e33ae7a0417" providerId="ADAL" clId="{DFF9E84E-5922-4F26-9EAD-8AB4E668133E}" dt="2026-10-27T20:29:04.539" v="1737" actId="47"/>
-        <pc:sldMkLst>
-          <pc:docMk/>
-          <pc:sldMk cId="2284026127" sldId="368"/>
-        </pc:sldMkLst>
-        <pc:spChg chg="mod">
-          <ac:chgData name="Eder Silva" userId="9b7f41b4-798d-40cf-8f87-8e33ae7a0417" providerId="ADAL" clId="{DFF9E84E-5922-4F26-9EAD-8AB4E668133E}" dt="2026-10-27T20:24:32.854" v="1208" actId="947"/>
-          <ac:spMkLst>
-            <pc:docMk/>
-            <pc:sldMk cId="2284026127" sldId="368"/>
-            <ac:spMk id="2" creationId="{00000000-0000-0000-0000-000000000000}"/>
-          </ac:spMkLst>
-        </pc:spChg>
-        <pc:spChg chg="mod">
-          <ac:chgData name="Eder Silva" userId="9b7f41b4-798d-40cf-8f87-8e33ae7a0417" providerId="ADAL" clId="{DFF9E84E-5922-4F26-9EAD-8AB4E668133E}" dt="2026-10-27T20:24:33.487" v="1319" actId="947"/>
-          <ac:spMkLst>
-            <pc:docMk/>
-            <pc:sldMk cId="2284026127" sldId="368"/>
-            <ac:spMk id="5" creationId="{00000000-0000-0000-0000-000000000000}"/>
-          </ac:spMkLst>
-        </pc:spChg>
-        <pc:spChg chg="mod">
-          <ac:chgData name="Eder Silva" userId="9b7f41b4-798d-40cf-8f87-8e33ae7a0417" providerId="ADAL" clId="{DFF9E84E-5922-4F26-9EAD-8AB4E668133E}" dt="2026-10-27T20:24:33.493" v="1320" actId="947"/>
-          <ac:spMkLst>
-            <pc:docMk/>
-            <pc:sldMk cId="2284026127" sldId="368"/>
-            <ac:spMk id="7" creationId="{00000000-0000-0000-0000-000000000000}"/>
-          </ac:spMkLst>
-        </pc:spChg>
-        <pc:spChg chg="mod">
-          <ac:chgData name="Eder Silva" userId="9b7f41b4-798d-40cf-8f87-8e33ae7a0417" providerId="ADAL" clId="{DFF9E84E-5922-4F26-9EAD-8AB4E668133E}" dt="2026-10-27T20:24:33.498" v="1321" actId="947"/>
-          <ac:spMkLst>
-            <pc:docMk/>
-            <pc:sldMk cId="2284026127" sldId="368"/>
-            <ac:spMk id="9" creationId="{00000000-0000-0000-0000-000000000000}"/>
-          </ac:spMkLst>
-        </pc:spChg>
-        <pc:spChg chg="mod">
-          <ac:chgData name="Eder Silva" userId="9b7f41b4-798d-40cf-8f87-8e33ae7a0417" providerId="ADAL" clId="{DFF9E84E-5922-4F26-9EAD-8AB4E668133E}" dt="2026-10-27T20:24:33.503" v="1322" actId="947"/>
-          <ac:spMkLst>
-            <pc:docMk/>
-            <pc:sldMk cId="2284026127" sldId="368"/>
-            <ac:spMk id="11" creationId="{00000000-0000-0000-0000-000000000000}"/>
-          </ac:spMkLst>
-        </pc:spChg>
-        <pc:spChg chg="mod">
-          <ac:chgData name="Eder Silva" userId="9b7f41b4-798d-40cf-8f87-8e33ae7a0417" providerId="ADAL" clId="{DFF9E84E-5922-4F26-9EAD-8AB4E668133E}" dt="2026-10-27T20:24:33.508" v="1323" actId="947"/>
-          <ac:spMkLst>
-            <pc:docMk/>
-            <pc:sldMk cId="2284026127" sldId="368"/>
-            <ac:spMk id="13" creationId="{00000000-0000-0000-0000-000000000000}"/>
-          </ac:spMkLst>
-        </pc:spChg>
-        <pc:spChg chg="mod">
-          <ac:chgData name="Eder Silva" userId="9b7f41b4-798d-40cf-8f87-8e33ae7a0417" providerId="ADAL" clId="{DFF9E84E-5922-4F26-9EAD-8AB4E668133E}" dt="2026-10-27T20:24:33.185" v="1258" actId="947"/>
-          <ac:spMkLst>
-            <pc:docMk/>
-            <pc:sldMk cId="2284026127" sldId="368"/>
-            <ac:spMk id="14" creationId="{00000000-0000-0000-0000-000000000000}"/>
-          </ac:spMkLst>
-        </pc:spChg>
-      </pc:sldChg>
-      <pc:sldChg chg="modSp add del mod ord modNotes">
-        <pc:chgData name="Eder Silva" userId="9b7f41b4-798d-40cf-8f87-8e33ae7a0417" providerId="ADAL" clId="{DFF9E84E-5922-4F26-9EAD-8AB4E668133E}" dt="2026-10-27T20:29:04.539" v="1737" actId="47"/>
-        <pc:sldMkLst>
-          <pc:docMk/>
-          <pc:sldMk cId="53653416" sldId="369"/>
-        </pc:sldMkLst>
-        <pc:spChg chg="mod">
-          <ac:chgData name="Eder Silva" userId="9b7f41b4-798d-40cf-8f87-8e33ae7a0417" providerId="ADAL" clId="{DFF9E84E-5922-4F26-9EAD-8AB4E668133E}" dt="2026-10-27T20:24:33.571" v="1329" actId="947"/>
-          <ac:spMkLst>
-            <pc:docMk/>
-            <pc:sldMk cId="53653416" sldId="369"/>
-            <ac:spMk id="2" creationId="{00000000-0000-0000-0000-000000000000}"/>
-          </ac:spMkLst>
-        </pc:spChg>
-        <pc:spChg chg="mod">
-          <ac:chgData name="Eder Silva" userId="9b7f41b4-798d-40cf-8f87-8e33ae7a0417" providerId="ADAL" clId="{DFF9E84E-5922-4F26-9EAD-8AB4E668133E}" dt="2026-10-27T20:24:34.088" v="1420" actId="947"/>
-          <ac:spMkLst>
-            <pc:docMk/>
-            <pc:sldMk cId="53653416" sldId="369"/>
-            <ac:spMk id="5" creationId="{00000000-0000-0000-0000-000000000000}"/>
-          </ac:spMkLst>
-        </pc:spChg>
-        <pc:spChg chg="mod">
-          <ac:chgData name="Eder Silva" userId="9b7f41b4-798d-40cf-8f87-8e33ae7a0417" providerId="ADAL" clId="{DFF9E84E-5922-4F26-9EAD-8AB4E668133E}" dt="2026-10-27T20:24:34.093" v="1421" actId="947"/>
-          <ac:spMkLst>
-            <pc:docMk/>
-            <pc:sldMk cId="53653416" sldId="369"/>
-            <ac:spMk id="7" creationId="{00000000-0000-0000-0000-000000000000}"/>
-          </ac:spMkLst>
-        </pc:spChg>
-        <pc:spChg chg="mod">
-          <ac:chgData name="Eder Silva" userId="9b7f41b4-798d-40cf-8f87-8e33ae7a0417" providerId="ADAL" clId="{DFF9E84E-5922-4F26-9EAD-8AB4E668133E}" dt="2026-10-27T20:24:34.097" v="1422" actId="947"/>
-          <ac:spMkLst>
-            <pc:docMk/>
-            <pc:sldMk cId="53653416" sldId="369"/>
-            <ac:spMk id="9" creationId="{00000000-0000-0000-0000-000000000000}"/>
-          </ac:spMkLst>
-        </pc:spChg>
-        <pc:spChg chg="mod">
-          <ac:chgData name="Eder Silva" userId="9b7f41b4-798d-40cf-8f87-8e33ae7a0417" providerId="ADAL" clId="{DFF9E84E-5922-4F26-9EAD-8AB4E668133E}" dt="2026-10-27T20:24:34.104" v="1423" actId="947"/>
-          <ac:spMkLst>
-            <pc:docMk/>
-            <pc:sldMk cId="53653416" sldId="369"/>
-            <ac:spMk id="11" creationId="{00000000-0000-0000-0000-000000000000}"/>
-          </ac:spMkLst>
-        </pc:spChg>
-        <pc:spChg chg="mod">
-          <ac:chgData name="Eder Silva" userId="9b7f41b4-798d-40cf-8f87-8e33ae7a0417" providerId="ADAL" clId="{DFF9E84E-5922-4F26-9EAD-8AB4E668133E}" dt="2026-10-27T20:24:34.111" v="1424" actId="947"/>
-          <ac:spMkLst>
-            <pc:docMk/>
-            <pc:sldMk cId="53653416" sldId="369"/>
-            <ac:spMk id="13" creationId="{00000000-0000-0000-0000-000000000000}"/>
-          </ac:spMkLst>
-        </pc:spChg>
-        <pc:spChg chg="mod">
-          <ac:chgData name="Eder Silva" userId="9b7f41b4-798d-40cf-8f87-8e33ae7a0417" providerId="ADAL" clId="{DFF9E84E-5922-4F26-9EAD-8AB4E668133E}" dt="2026-10-27T20:24:33.752" v="1359" actId="947"/>
-          <ac:spMkLst>
-            <pc:docMk/>
-            <pc:sldMk cId="53653416" sldId="369"/>
-            <ac:spMk id="14" creationId="{00000000-0000-0000-0000-000000000000}"/>
-          </ac:spMkLst>
-        </pc:spChg>
-      </pc:sldChg>
-      <pc:sldChg chg="add del ord">
-        <pc:chgData name="Eder Silva" userId="9b7f41b4-798d-40cf-8f87-8e33ae7a0417" providerId="ADAL" clId="{DFF9E84E-5922-4F26-9EAD-8AB4E668133E}" dt="2026-10-27T20:29:04.539" v="1737" actId="47"/>
-        <pc:sldMkLst>
-          <pc:docMk/>
-          <pc:sldMk cId="3369215739" sldId="370"/>
-        </pc:sldMkLst>
-      </pc:sldChg>
-      <pc:sldChg chg="add del ord">
-        <pc:chgData name="Eder Silva" userId="9b7f41b4-798d-40cf-8f87-8e33ae7a0417" providerId="ADAL" clId="{DFF9E84E-5922-4F26-9EAD-8AB4E668133E}" dt="2026-10-27T20:29:04.539" v="1737" actId="47"/>
-        <pc:sldMkLst>
-          <pc:docMk/>
-          <pc:sldMk cId="3567099585" sldId="371"/>
-        </pc:sldMkLst>
-      </pc:sldChg>
-      <pc:sldChg chg="add del ord">
-        <pc:chgData name="Eder Silva" userId="9b7f41b4-798d-40cf-8f87-8e33ae7a0417" providerId="ADAL" clId="{DFF9E84E-5922-4F26-9EAD-8AB4E668133E}" dt="2026-10-27T20:29:04.539" v="1737" actId="47"/>
-        <pc:sldMkLst>
-          <pc:docMk/>
-          <pc:sldMk cId="2476506829" sldId="372"/>
-        </pc:sldMkLst>
-      </pc:sldChg>
-      <pc:sldChg chg="add del ord">
-        <pc:chgData name="Eder Silva" userId="9b7f41b4-798d-40cf-8f87-8e33ae7a0417" providerId="ADAL" clId="{DFF9E84E-5922-4F26-9EAD-8AB4E668133E}" dt="2026-10-27T20:29:04.539" v="1737" actId="47"/>
-        <pc:sldMkLst>
-          <pc:docMk/>
-          <pc:sldMk cId="575584459" sldId="373"/>
-        </pc:sldMkLst>
-      </pc:sldChg>
-      <pc:sldChg chg="add del ord">
-        <pc:chgData name="Eder Silva" userId="9b7f41b4-798d-40cf-8f87-8e33ae7a0417" providerId="ADAL" clId="{DFF9E84E-5922-4F26-9EAD-8AB4E668133E}" dt="2026-10-27T20:29:04.539" v="1737" actId="47"/>
-        <pc:sldMkLst>
-          <pc:docMk/>
-          <pc:sldMk cId="2883099127" sldId="374"/>
-        </pc:sldMkLst>
-      </pc:sldChg>
-      <pc:sldChg chg="modSp add del mod ord modNotes">
-        <pc:chgData name="Eder Silva" userId="9b7f41b4-798d-40cf-8f87-8e33ae7a0417" providerId="ADAL" clId="{DFF9E84E-5922-4F26-9EAD-8AB4E668133E}" dt="2026-10-27T20:29:04.539" v="1737" actId="47"/>
-        <pc:sldMkLst>
-          <pc:docMk/>
-          <pc:sldMk cId="4034194576" sldId="375"/>
-        </pc:sldMkLst>
-        <pc:spChg chg="mod">
-          <ac:chgData name="Eder Silva" userId="9b7f41b4-798d-40cf-8f87-8e33ae7a0417" providerId="ADAL" clId="{DFF9E84E-5922-4F26-9EAD-8AB4E668133E}" dt="2026-10-27T20:24:34.309" v="1445" actId="947"/>
-          <ac:spMkLst>
-            <pc:docMk/>
-            <pc:sldMk cId="4034194576" sldId="375"/>
-            <ac:spMk id="2" creationId="{00000000-0000-0000-0000-000000000000}"/>
-          </ac:spMkLst>
-        </pc:spChg>
-        <pc:spChg chg="mod">
-          <ac:chgData name="Eder Silva" userId="9b7f41b4-798d-40cf-8f87-8e33ae7a0417" providerId="ADAL" clId="{DFF9E84E-5922-4F26-9EAD-8AB4E668133E}" dt="2026-10-27T20:24:34.883" v="1544" actId="947"/>
-          <ac:spMkLst>
-            <pc:docMk/>
-            <pc:sldMk cId="4034194576" sldId="375"/>
-            <ac:spMk id="5" creationId="{00000000-0000-0000-0000-000000000000}"/>
-          </ac:spMkLst>
-        </pc:spChg>
-        <pc:spChg chg="mod">
-          <ac:chgData name="Eder Silva" userId="9b7f41b4-798d-40cf-8f87-8e33ae7a0417" providerId="ADAL" clId="{DFF9E84E-5922-4F26-9EAD-8AB4E668133E}" dt="2026-10-27T20:24:34.886" v="1545" actId="947"/>
-          <ac:spMkLst>
-            <pc:docMk/>
-            <pc:sldMk cId="4034194576" sldId="375"/>
-            <ac:spMk id="7" creationId="{00000000-0000-0000-0000-000000000000}"/>
-          </ac:spMkLst>
-        </pc:spChg>
-        <pc:spChg chg="mod">
-          <ac:chgData name="Eder Silva" userId="9b7f41b4-798d-40cf-8f87-8e33ae7a0417" providerId="ADAL" clId="{DFF9E84E-5922-4F26-9EAD-8AB4E668133E}" dt="2026-10-27T20:24:34.889" v="1546" actId="947"/>
-          <ac:spMkLst>
-            <pc:docMk/>
-            <pc:sldMk cId="4034194576" sldId="375"/>
-            <ac:spMk id="9" creationId="{00000000-0000-0000-0000-000000000000}"/>
-          </ac:spMkLst>
-        </pc:spChg>
-        <pc:spChg chg="mod">
-          <ac:chgData name="Eder Silva" userId="9b7f41b4-798d-40cf-8f87-8e33ae7a0417" providerId="ADAL" clId="{DFF9E84E-5922-4F26-9EAD-8AB4E668133E}" dt="2026-10-27T20:24:34.893" v="1547" actId="947"/>
-          <ac:spMkLst>
-            <pc:docMk/>
-            <pc:sldMk cId="4034194576" sldId="375"/>
-            <ac:spMk id="11" creationId="{00000000-0000-0000-0000-000000000000}"/>
-          </ac:spMkLst>
-        </pc:spChg>
-        <pc:spChg chg="mod">
-          <ac:chgData name="Eder Silva" userId="9b7f41b4-798d-40cf-8f87-8e33ae7a0417" providerId="ADAL" clId="{DFF9E84E-5922-4F26-9EAD-8AB4E668133E}" dt="2026-10-27T20:24:34.899" v="1548" actId="947"/>
-          <ac:spMkLst>
-            <pc:docMk/>
-            <pc:sldMk cId="4034194576" sldId="375"/>
-            <ac:spMk id="13" creationId="{00000000-0000-0000-0000-000000000000}"/>
-          </ac:spMkLst>
-        </pc:spChg>
-        <pc:spChg chg="mod">
-          <ac:chgData name="Eder Silva" userId="9b7f41b4-798d-40cf-8f87-8e33ae7a0417" providerId="ADAL" clId="{DFF9E84E-5922-4F26-9EAD-8AB4E668133E}" dt="2026-10-27T20:24:34.576" v="1483" actId="947"/>
-          <ac:spMkLst>
-            <pc:docMk/>
-            <pc:sldMk cId="4034194576" sldId="375"/>
-            <ac:spMk id="14" creationId="{00000000-0000-0000-0000-000000000000}"/>
-          </ac:spMkLst>
-        </pc:spChg>
-      </pc:sldChg>
-      <pc:sldChg chg="add del ord">
-        <pc:chgData name="Eder Silva" userId="9b7f41b4-798d-40cf-8f87-8e33ae7a0417" providerId="ADAL" clId="{DFF9E84E-5922-4F26-9EAD-8AB4E668133E}" dt="2026-10-27T20:29:04.539" v="1737" actId="47"/>
-        <pc:sldMkLst>
-          <pc:docMk/>
-          <pc:sldMk cId="2179494419" sldId="376"/>
-        </pc:sldMkLst>
-      </pc:sldChg>
-      <pc:sldChg chg="add del ord">
-        <pc:chgData name="Eder Silva" userId="9b7f41b4-798d-40cf-8f87-8e33ae7a0417" providerId="ADAL" clId="{DFF9E84E-5922-4F26-9EAD-8AB4E668133E}" dt="2026-10-27T20:29:04.539" v="1737" actId="47"/>
-        <pc:sldMkLst>
-          <pc:docMk/>
-          <pc:sldMk cId="1597805926" sldId="377"/>
-        </pc:sldMkLst>
-      </pc:sldChg>
-      <pc:sldChg chg="add del ord">
-        <pc:chgData name="Eder Silva" userId="9b7f41b4-798d-40cf-8f87-8e33ae7a0417" providerId="ADAL" clId="{DFF9E84E-5922-4F26-9EAD-8AB4E668133E}" dt="2026-10-27T20:29:04.539" v="1737" actId="47"/>
-        <pc:sldMkLst>
-          <pc:docMk/>
-          <pc:sldMk cId="3211686799" sldId="378"/>
-        </pc:sldMkLst>
-      </pc:sldChg>
-      <pc:sldChg chg="modSp add del mod ord modNotes">
-        <pc:chgData name="Eder Silva" userId="9b7f41b4-798d-40cf-8f87-8e33ae7a0417" providerId="ADAL" clId="{DFF9E84E-5922-4F26-9EAD-8AB4E668133E}" dt="2026-10-27T20:29:04.539" v="1737" actId="47"/>
-        <pc:sldMkLst>
-          <pc:docMk/>
-          <pc:sldMk cId="984593025" sldId="379"/>
-        </pc:sldMkLst>
-        <pc:spChg chg="mod">
-          <ac:chgData name="Eder Silva" userId="9b7f41b4-798d-40cf-8f87-8e33ae7a0417" providerId="ADAL" clId="{DFF9E84E-5922-4F26-9EAD-8AB4E668133E}" dt="2026-10-27T20:24:34.988" v="1563" actId="947"/>
-          <ac:spMkLst>
-            <pc:docMk/>
-            <pc:sldMk cId="984593025" sldId="379"/>
-            <ac:spMk id="2" creationId="{00000000-0000-0000-0000-000000000000}"/>
-          </ac:spMkLst>
-        </pc:spChg>
-        <pc:spChg chg="mod">
-          <ac:chgData name="Eder Silva" userId="9b7f41b4-798d-40cf-8f87-8e33ae7a0417" providerId="ADAL" clId="{DFF9E84E-5922-4F26-9EAD-8AB4E668133E}" dt="2026-10-27T20:24:35.630" v="1682" actId="947"/>
-          <ac:spMkLst>
-            <pc:docMk/>
-            <pc:sldMk cId="984593025" sldId="379"/>
-            <ac:spMk id="5" creationId="{00000000-0000-0000-0000-000000000000}"/>
-          </ac:spMkLst>
-        </pc:spChg>
-        <pc:spChg chg="mod">
-          <ac:chgData name="Eder Silva" userId="9b7f41b4-798d-40cf-8f87-8e33ae7a0417" providerId="ADAL" clId="{DFF9E84E-5922-4F26-9EAD-8AB4E668133E}" dt="2026-10-27T20:24:35.634" v="1683" actId="947"/>
-          <ac:spMkLst>
-            <pc:docMk/>
-            <pc:sldMk cId="984593025" sldId="379"/>
-            <ac:spMk id="7" creationId="{00000000-0000-0000-0000-000000000000}"/>
-          </ac:spMkLst>
-        </pc:spChg>
-        <pc:spChg chg="mod">
-          <ac:chgData name="Eder Silva" userId="9b7f41b4-798d-40cf-8f87-8e33ae7a0417" providerId="ADAL" clId="{DFF9E84E-5922-4F26-9EAD-8AB4E668133E}" dt="2026-10-27T20:24:35.640" v="1684" actId="947"/>
-          <ac:spMkLst>
-            <pc:docMk/>
-            <pc:sldMk cId="984593025" sldId="379"/>
-            <ac:spMk id="9" creationId="{00000000-0000-0000-0000-000000000000}"/>
-          </ac:spMkLst>
-        </pc:spChg>
-        <pc:spChg chg="mod">
-          <ac:chgData name="Eder Silva" userId="9b7f41b4-798d-40cf-8f87-8e33ae7a0417" providerId="ADAL" clId="{DFF9E84E-5922-4F26-9EAD-8AB4E668133E}" dt="2026-10-27T20:24:35.644" v="1685" actId="947"/>
-          <ac:spMkLst>
-            <pc:docMk/>
-            <pc:sldMk cId="984593025" sldId="379"/>
-            <ac:spMk id="11" creationId="{00000000-0000-0000-0000-000000000000}"/>
-          </ac:spMkLst>
-        </pc:spChg>
-        <pc:spChg chg="mod">
-          <ac:chgData name="Eder Silva" userId="9b7f41b4-798d-40cf-8f87-8e33ae7a0417" providerId="ADAL" clId="{DFF9E84E-5922-4F26-9EAD-8AB4E668133E}" dt="2026-10-27T20:24:35.649" v="1686" actId="947"/>
-          <ac:spMkLst>
-            <pc:docMk/>
-            <pc:sldMk cId="984593025" sldId="379"/>
-            <ac:spMk id="13" creationId="{00000000-0000-0000-0000-000000000000}"/>
-          </ac:spMkLst>
-        </pc:spChg>
-        <pc:spChg chg="mod">
-          <ac:chgData name="Eder Silva" userId="9b7f41b4-798d-40cf-8f87-8e33ae7a0417" providerId="ADAL" clId="{DFF9E84E-5922-4F26-9EAD-8AB4E668133E}" dt="2026-10-27T20:24:35.342" v="1621" actId="947"/>
-          <ac:spMkLst>
-            <pc:docMk/>
-            <pc:sldMk cId="984593025" sldId="379"/>
-            <ac:spMk id="14" creationId="{00000000-0000-0000-0000-000000000000}"/>
-          </ac:spMkLst>
-        </pc:spChg>
-      </pc:sldChg>
-      <pc:sldChg chg="add del ord">
-        <pc:chgData name="Eder Silva" userId="9b7f41b4-798d-40cf-8f87-8e33ae7a0417" providerId="ADAL" clId="{DFF9E84E-5922-4F26-9EAD-8AB4E668133E}" dt="2026-10-27T20:29:04.539" v="1737" actId="47"/>
-        <pc:sldMkLst>
-          <pc:docMk/>
-          <pc:sldMk cId="3047409679" sldId="380"/>
-        </pc:sldMkLst>
-      </pc:sldChg>
-      <pc:sldChg chg="add del ord">
-        <pc:chgData name="Eder Silva" userId="9b7f41b4-798d-40cf-8f87-8e33ae7a0417" providerId="ADAL" clId="{DFF9E84E-5922-4F26-9EAD-8AB4E668133E}" dt="2026-10-27T20:29:04.539" v="1737" actId="47"/>
-        <pc:sldMkLst>
-          <pc:docMk/>
-          <pc:sldMk cId="1216252208" sldId="381"/>
-        </pc:sldMkLst>
-      </pc:sldChg>
-      <pc:sldChg chg="add del ord">
-        <pc:chgData name="Eder Silva" userId="9b7f41b4-798d-40cf-8f87-8e33ae7a0417" providerId="ADAL" clId="{DFF9E84E-5922-4F26-9EAD-8AB4E668133E}" dt="2026-10-27T20:29:04.539" v="1737" actId="47"/>
-        <pc:sldMkLst>
-          <pc:docMk/>
-          <pc:sldMk cId="2380147418" sldId="382"/>
-        </pc:sldMkLst>
-      </pc:sldChg>
-      <pc:sldChg chg="add del ord">
-        <pc:chgData name="Eder Silva" userId="9b7f41b4-798d-40cf-8f87-8e33ae7a0417" providerId="ADAL" clId="{DFF9E84E-5922-4F26-9EAD-8AB4E668133E}" dt="2026-10-27T20:29:04.539" v="1737" actId="47"/>
-        <pc:sldMkLst>
-          <pc:docMk/>
-          <pc:sldMk cId="286714810" sldId="383"/>
-        </pc:sldMkLst>
-      </pc:sldChg>
-      <pc:sldChg chg="add del ord">
-        <pc:chgData name="Eder Silva" userId="9b7f41b4-798d-40cf-8f87-8e33ae7a0417" providerId="ADAL" clId="{DFF9E84E-5922-4F26-9EAD-8AB4E668133E}" dt="2026-10-27T20:29:04.539" v="1737" actId="47"/>
-        <pc:sldMkLst>
-          <pc:docMk/>
-          <pc:sldMk cId="541256039" sldId="384"/>
-        </pc:sldMkLst>
-      </pc:sldChg>
-      <pc:sldChg chg="del">
-        <pc:chgData name="Eder Silva" userId="9b7f41b4-798d-40cf-8f87-8e33ae7a0417" providerId="ADAL" clId="{DFF9E84E-5922-4F26-9EAD-8AB4E668133E}" dt="2026-10-27T20:29:04.539" v="1737" actId="47"/>
-        <pc:sldMkLst>
-          <pc:docMk/>
-          <pc:sldMk cId="1690716328" sldId="385"/>
-        </pc:sldMkLst>
-      </pc:sldChg>
-      <pc:sldChg chg="del">
-        <pc:chgData name="Eder Silva" userId="9b7f41b4-798d-40cf-8f87-8e33ae7a0417" providerId="ADAL" clId="{DFF9E84E-5922-4F26-9EAD-8AB4E668133E}" dt="2026-10-27T20:29:04.539" v="1737" actId="47"/>
-        <pc:sldMkLst>
-          <pc:docMk/>
-          <pc:sldMk cId="2271620642" sldId="386"/>
-        </pc:sldMkLst>
-      </pc:sldChg>
-      <pc:sldChg chg="del">
-        <pc:chgData name="Eder Silva" userId="9b7f41b4-798d-40cf-8f87-8e33ae7a0417" providerId="ADAL" clId="{DFF9E84E-5922-4F26-9EAD-8AB4E668133E}" dt="2026-10-27T20:29:04.539" v="1737" actId="47"/>
-        <pc:sldMkLst>
-          <pc:docMk/>
-          <pc:sldMk cId="3864540494" sldId="387"/>
-        </pc:sldMkLst>
-      </pc:sldChg>
-      <pc:sldChg chg="del">
-        <pc:chgData name="Eder Silva" userId="9b7f41b4-798d-40cf-8f87-8e33ae7a0417" providerId="ADAL" clId="{DFF9E84E-5922-4F26-9EAD-8AB4E668133E}" dt="2026-10-27T20:29:04.539" v="1737" actId="47"/>
-        <pc:sldMkLst>
-          <pc:docMk/>
-          <pc:sldMk cId="4185990033" sldId="388"/>
-        </pc:sldMkLst>
-      </pc:sldChg>
-      <pc:sldChg chg="del">
-        <pc:chgData name="Eder Silva" userId="9b7f41b4-798d-40cf-8f87-8e33ae7a0417" providerId="ADAL" clId="{DFF9E84E-5922-4F26-9EAD-8AB4E668133E}" dt="2026-10-27T20:29:04.539" v="1737" actId="47"/>
-        <pc:sldMkLst>
-          <pc:docMk/>
-          <pc:sldMk cId="863800861" sldId="389"/>
-        </pc:sldMkLst>
-      </pc:sldChg>
-      <pc:sldChg chg="del">
-        <pc:chgData name="Eder Silva" userId="9b7f41b4-798d-40cf-8f87-8e33ae7a0417" providerId="ADAL" clId="{DFF9E84E-5922-4F26-9EAD-8AB4E668133E}" dt="2026-10-27T20:29:04.539" v="1737" actId="47"/>
-        <pc:sldMkLst>
-          <pc:docMk/>
-          <pc:sldMk cId="1664773523" sldId="390"/>
-        </pc:sldMkLst>
-      </pc:sldChg>
-      <pc:sldChg chg="del">
-        <pc:chgData name="Eder Silva" userId="9b7f41b4-798d-40cf-8f87-8e33ae7a0417" providerId="ADAL" clId="{DFF9E84E-5922-4F26-9EAD-8AB4E668133E}" dt="2026-10-27T20:29:04.539" v="1737" actId="47"/>
-        <pc:sldMkLst>
-          <pc:docMk/>
-          <pc:sldMk cId="2959154275" sldId="391"/>
-        </pc:sldMkLst>
-      </pc:sldChg>
-      <pc:sldChg chg="del">
-        <pc:chgData name="Eder Silva" userId="9b7f41b4-798d-40cf-8f87-8e33ae7a0417" providerId="ADAL" clId="{DFF9E84E-5922-4F26-9EAD-8AB4E668133E}" dt="2026-10-27T20:29:04.539" v="1737" actId="47"/>
-        <pc:sldMkLst>
-          <pc:docMk/>
-          <pc:sldMk cId="3371124664" sldId="392"/>
-        </pc:sldMkLst>
-      </pc:sldChg>
-      <pc:sldChg chg="del">
-        <pc:chgData name="Eder Silva" userId="9b7f41b4-798d-40cf-8f87-8e33ae7a0417" providerId="ADAL" clId="{DFF9E84E-5922-4F26-9EAD-8AB4E668133E}" dt="2026-10-27T20:29:04.539" v="1737" actId="47"/>
-        <pc:sldMkLst>
-          <pc:docMk/>
-          <pc:sldMk cId="2569835075" sldId="393"/>
-        </pc:sldMkLst>
-      </pc:sldChg>
-      <pc:sldChg chg="del">
-        <pc:chgData name="Eder Silva" userId="9b7f41b4-798d-40cf-8f87-8e33ae7a0417" providerId="ADAL" clId="{DFF9E84E-5922-4F26-9EAD-8AB4E668133E}" dt="2026-10-27T20:29:04.539" v="1737" actId="47"/>
-        <pc:sldMkLst>
-          <pc:docMk/>
-          <pc:sldMk cId="3020171308" sldId="394"/>
-        </pc:sldMkLst>
-      </pc:sldChg>
-      <pc:sldChg chg="del">
-        <pc:chgData name="Eder Silva" userId="9b7f41b4-798d-40cf-8f87-8e33ae7a0417" providerId="ADAL" clId="{DFF9E84E-5922-4F26-9EAD-8AB4E668133E}" dt="2026-10-27T20:29:04.539" v="1737" actId="47"/>
-        <pc:sldMkLst>
-          <pc:docMk/>
-          <pc:sldMk cId="4211369795" sldId="395"/>
-        </pc:sldMkLst>
-      </pc:sldChg>
-      <pc:sldChg chg="del">
-        <pc:chgData name="Eder Silva" userId="9b7f41b4-798d-40cf-8f87-8e33ae7a0417" providerId="ADAL" clId="{DFF9E84E-5922-4F26-9EAD-8AB4E668133E}" dt="2026-10-27T20:29:04.539" v="1737" actId="47"/>
-        <pc:sldMkLst>
-          <pc:docMk/>
-          <pc:sldMk cId="3343991135" sldId="396"/>
-        </pc:sldMkLst>
-      </pc:sldChg>
-      <pc:sldChg chg="del">
-        <pc:chgData name="Eder Silva" userId="9b7f41b4-798d-40cf-8f87-8e33ae7a0417" providerId="ADAL" clId="{DFF9E84E-5922-4F26-9EAD-8AB4E668133E}" dt="2026-10-27T20:29:04.539" v="1737" actId="47"/>
-        <pc:sldMkLst>
-          <pc:docMk/>
-          <pc:sldMk cId="1493037408" sldId="397"/>
-        </pc:sldMkLst>
-      </pc:sldChg>
-      <pc:sldChg chg="del">
-        <pc:chgData name="Eder Silva" userId="9b7f41b4-798d-40cf-8f87-8e33ae7a0417" providerId="ADAL" clId="{DFF9E84E-5922-4F26-9EAD-8AB4E668133E}" dt="2026-10-27T20:29:04.539" v="1737" actId="47"/>
-        <pc:sldMkLst>
-          <pc:docMk/>
-          <pc:sldMk cId="838145820" sldId="398"/>
-        </pc:sldMkLst>
-      </pc:sldChg>
-      <pc:sldChg chg="del">
-        <pc:chgData name="Eder Silva" userId="9b7f41b4-798d-40cf-8f87-8e33ae7a0417" providerId="ADAL" clId="{DFF9E84E-5922-4F26-9EAD-8AB4E668133E}" dt="2026-10-27T20:29:04.539" v="1737" actId="47"/>
-        <pc:sldMkLst>
-          <pc:docMk/>
-          <pc:sldMk cId="393458837" sldId="399"/>
-        </pc:sldMkLst>
-      </pc:sldChg>
-      <pc:sldChg chg="del">
-        <pc:chgData name="Eder Silva" userId="9b7f41b4-798d-40cf-8f87-8e33ae7a0417" providerId="ADAL" clId="{DFF9E84E-5922-4F26-9EAD-8AB4E668133E}" dt="2026-10-27T20:29:04.539" v="1737" actId="47"/>
-        <pc:sldMkLst>
-          <pc:docMk/>
-          <pc:sldMk cId="204487673" sldId="400"/>
-        </pc:sldMkLst>
-      </pc:sldChg>
-      <pc:sldChg chg="del">
-        <pc:chgData name="Eder Silva" userId="9b7f41b4-798d-40cf-8f87-8e33ae7a0417" providerId="ADAL" clId="{DFF9E84E-5922-4F26-9EAD-8AB4E668133E}" dt="2026-10-27T20:29:04.539" v="1737" actId="47"/>
-        <pc:sldMkLst>
-          <pc:docMk/>
-          <pc:sldMk cId="4163734863" sldId="401"/>
-        </pc:sldMkLst>
-      </pc:sldChg>
-      <pc:sldChg chg="del">
-        <pc:chgData name="Eder Silva" userId="9b7f41b4-798d-40cf-8f87-8e33ae7a0417" providerId="ADAL" clId="{DFF9E84E-5922-4F26-9EAD-8AB4E668133E}" dt="2026-10-27T20:29:04.539" v="1737" actId="47"/>
-        <pc:sldMkLst>
-          <pc:docMk/>
-          <pc:sldMk cId="1294082376" sldId="402"/>
-        </pc:sldMkLst>
-      </pc:sldChg>
-      <pc:sldChg chg="del">
-        <pc:chgData name="Eder Silva" userId="9b7f41b4-798d-40cf-8f87-8e33ae7a0417" providerId="ADAL" clId="{DFF9E84E-5922-4F26-9EAD-8AB4E668133E}" dt="2026-10-27T20:29:04.539" v="1737" actId="47"/>
-        <pc:sldMkLst>
-          <pc:docMk/>
-          <pc:sldMk cId="629920193" sldId="403"/>
-        </pc:sldMkLst>
-      </pc:sldChg>
-      <pc:sldChg chg="del">
-        <pc:chgData name="Eder Silva" userId="9b7f41b4-798d-40cf-8f87-8e33ae7a0417" providerId="ADAL" clId="{DFF9E84E-5922-4F26-9EAD-8AB4E668133E}" dt="2026-10-27T20:29:04.539" v="1737" actId="47"/>
-        <pc:sldMkLst>
-          <pc:docMk/>
-          <pc:sldMk cId="2565720608" sldId="404"/>
-        </pc:sldMkLst>
-      </pc:sldChg>
-      <pc:sldChg chg="del">
-        <pc:chgData name="Eder Silva" userId="9b7f41b4-798d-40cf-8f87-8e33ae7a0417" providerId="ADAL" clId="{DFF9E84E-5922-4F26-9EAD-8AB4E668133E}" dt="2026-10-27T20:29:04.539" v="1737" actId="47"/>
-        <pc:sldMkLst>
-          <pc:docMk/>
-          <pc:sldMk cId="1273220964" sldId="405"/>
-        </pc:sldMkLst>
-      </pc:sldChg>
-      <pc:sldChg chg="del">
-        <pc:chgData name="Eder Silva" userId="9b7f41b4-798d-40cf-8f87-8e33ae7a0417" providerId="ADAL" clId="{DFF9E84E-5922-4F26-9EAD-8AB4E668133E}" dt="2026-10-27T20:29:04.539" v="1737" actId="47"/>
-        <pc:sldMkLst>
-          <pc:docMk/>
-          <pc:sldMk cId="3180564731" sldId="406"/>
-        </pc:sldMkLst>
-      </pc:sldChg>
-      <pc:sldChg chg="del">
-        <pc:chgData name="Eder Silva" userId="9b7f41b4-798d-40cf-8f87-8e33ae7a0417" providerId="ADAL" clId="{DFF9E84E-5922-4F26-9EAD-8AB4E668133E}" dt="2026-10-27T20:29:04.539" v="1737" actId="47"/>
-        <pc:sldMkLst>
-          <pc:docMk/>
-          <pc:sldMk cId="3752121928" sldId="407"/>
-        </pc:sldMkLst>
-      </pc:sldChg>
-      <pc:sldChg chg="del">
-        <pc:chgData name="Eder Silva" userId="9b7f41b4-798d-40cf-8f87-8e33ae7a0417" providerId="ADAL" clId="{DFF9E84E-5922-4F26-9EAD-8AB4E668133E}" dt="2026-10-27T20:29:04.539" v="1737" actId="47"/>
-        <pc:sldMkLst>
-          <pc:docMk/>
-          <pc:sldMk cId="1126013704" sldId="408"/>
-        </pc:sldMkLst>
-      </pc:sldChg>
-      <pc:sldChg chg="del">
-        <pc:chgData name="Eder Silva" userId="9b7f41b4-798d-40cf-8f87-8e33ae7a0417" providerId="ADAL" clId="{DFF9E84E-5922-4F26-9EAD-8AB4E668133E}" dt="2026-10-27T20:29:04.539" v="1737" actId="47"/>
-        <pc:sldMkLst>
-          <pc:docMk/>
-          <pc:sldMk cId="2476978483" sldId="409"/>
-        </pc:sldMkLst>
-      </pc:sldChg>
-      <pc:sldChg chg="del">
-        <pc:chgData name="Eder Silva" userId="9b7f41b4-798d-40cf-8f87-8e33ae7a0417" providerId="ADAL" clId="{DFF9E84E-5922-4F26-9EAD-8AB4E668133E}" dt="2026-10-27T20:29:04.539" v="1737" actId="47"/>
-        <pc:sldMkLst>
-          <pc:docMk/>
-          <pc:sldMk cId="1014457945" sldId="410"/>
-        </pc:sldMkLst>
-      </pc:sldChg>
-      <pc:sldChg chg="del">
-        <pc:chgData name="Eder Silva" userId="9b7f41b4-798d-40cf-8f87-8e33ae7a0417" providerId="ADAL" clId="{DFF9E84E-5922-4F26-9EAD-8AB4E668133E}" dt="2026-10-27T20:29:04.539" v="1737" actId="47"/>
-        <pc:sldMkLst>
-          <pc:docMk/>
-          <pc:sldMk cId="632048277" sldId="411"/>
-        </pc:sldMkLst>
-      </pc:sldChg>
-      <pc:sldMasterChg chg="delSp mod">
-        <pc:chgData name="Eder Silva" userId="9b7f41b4-798d-40cf-8f87-8e33ae7a0417" providerId="ADAL" clId="{DFF9E84E-5922-4F26-9EAD-8AB4E668133E}" dt="2026-10-27T15:51:19.877" v="544"/>
-        <pc:sldMasterMkLst>
-          <pc:docMk/>
-          <pc:sldMasterMk cId="2209977519" sldId="2147483660"/>
-        </pc:sldMasterMkLst>
-        <pc:spChg chg="del">
-          <ac:chgData name="Eder Silva" userId="9b7f41b4-798d-40cf-8f87-8e33ae7a0417" providerId="ADAL" clId="{DFF9E84E-5922-4F26-9EAD-8AB4E668133E}" dt="2026-10-27T15:51:19.877" v="544"/>
-          <ac:spMkLst>
-            <pc:docMk/>
-            <pc:sldMasterMk cId="2209977519" sldId="2147483660"/>
-            <ac:spMk id="8" creationId="{F20A0968-A05B-B1FD-0EEA-3536F63355D3}"/>
-          </ac:spMkLst>
-        </pc:spChg>
-      </pc:sldMasterChg>
     </pc:docChg>
   </pc:docChgLst>
 </pc:chgInfo>
@@ -6131,7 +3556,7 @@
           <a:p>
             <a:fld id="{5BCAD085-E8A6-8845-BD4E-CB4CCA059FC4}" type="datetimeFigureOut">
               <a:rPr lang="en-US" smtClean="0"/>
-              <a:t>10/27/2026</a:t>
+              <a:t>10/30/2026</a:t>
             </a:fld>
             <a:endParaRPr lang="en-US"/>
           </a:p>
@@ -6299,7 +3724,7 @@
           <a:p>
             <a:fld id="{5BCAD085-E8A6-8845-BD4E-CB4CCA059FC4}" type="datetimeFigureOut">
               <a:rPr lang="en-US" smtClean="0"/>
-              <a:t>10/27/2026</a:t>
+              <a:t>10/30/2026</a:t>
             </a:fld>
             <a:endParaRPr lang="en-US"/>
           </a:p>
@@ -6477,7 +3902,7 @@
           <a:p>
             <a:fld id="{5BCAD085-E8A6-8845-BD4E-CB4CCA059FC4}" type="datetimeFigureOut">
               <a:rPr lang="en-US" smtClean="0"/>
-              <a:t>10/27/2026</a:t>
+              <a:t>10/30/2026</a:t>
             </a:fld>
             <a:endParaRPr lang="en-US"/>
           </a:p>
@@ -6645,7 +4070,7 @@
           <a:p>
             <a:fld id="{5BCAD085-E8A6-8845-BD4E-CB4CCA059FC4}" type="datetimeFigureOut">
               <a:rPr lang="en-US" smtClean="0"/>
-              <a:t>10/27/2026</a:t>
+              <a:t>10/30/2026</a:t>
             </a:fld>
             <a:endParaRPr lang="en-US"/>
           </a:p>
@@ -6890,7 +4315,7 @@
           <a:p>
             <a:fld id="{5BCAD085-E8A6-8845-BD4E-CB4CCA059FC4}" type="datetimeFigureOut">
               <a:rPr lang="en-US" smtClean="0"/>
-              <a:t>10/27/2026</a:t>
+              <a:t>10/30/2026</a:t>
             </a:fld>
             <a:endParaRPr lang="en-US"/>
           </a:p>
@@ -7175,7 +4600,7 @@
           <a:p>
             <a:fld id="{5BCAD085-E8A6-8845-BD4E-CB4CCA059FC4}" type="datetimeFigureOut">
               <a:rPr lang="en-US" smtClean="0"/>
-              <a:t>10/27/2026</a:t>
+              <a:t>10/30/2026</a:t>
             </a:fld>
             <a:endParaRPr lang="en-US"/>
           </a:p>
@@ -7594,7 +5019,7 @@
           <a:p>
             <a:fld id="{5BCAD085-E8A6-8845-BD4E-CB4CCA059FC4}" type="datetimeFigureOut">
               <a:rPr lang="en-US" smtClean="0"/>
-              <a:t>10/27/2026</a:t>
+              <a:t>10/30/2026</a:t>
             </a:fld>
             <a:endParaRPr lang="en-US"/>
           </a:p>
@@ -7711,7 +5136,7 @@
           <a:p>
             <a:fld id="{5BCAD085-E8A6-8845-BD4E-CB4CCA059FC4}" type="datetimeFigureOut">
               <a:rPr lang="en-US" smtClean="0"/>
-              <a:t>10/27/2026</a:t>
+              <a:t>10/30/2026</a:t>
             </a:fld>
             <a:endParaRPr lang="en-US"/>
           </a:p>
@@ -7806,7 +5231,7 @@
           <a:p>
             <a:fld id="{5BCAD085-E8A6-8845-BD4E-CB4CCA059FC4}" type="datetimeFigureOut">
               <a:rPr lang="en-US" smtClean="0"/>
-              <a:t>10/27/2026</a:t>
+              <a:t>10/30/2026</a:t>
             </a:fld>
             <a:endParaRPr lang="en-US"/>
           </a:p>
@@ -8081,7 +5506,7 @@
           <a:p>
             <a:fld id="{5BCAD085-E8A6-8845-BD4E-CB4CCA059FC4}" type="datetimeFigureOut">
               <a:rPr lang="en-US" smtClean="0"/>
-              <a:t>10/27/2026</a:t>
+              <a:t>10/30/2026</a:t>
             </a:fld>
             <a:endParaRPr lang="en-US"/>
           </a:p>
@@ -8333,7 +5758,7 @@
           <a:p>
             <a:fld id="{5BCAD085-E8A6-8845-BD4E-CB4CCA059FC4}" type="datetimeFigureOut">
               <a:rPr lang="en-US" smtClean="0"/>
-              <a:t>10/27/2026</a:t>
+              <a:t>10/30/2026</a:t>
             </a:fld>
             <a:endParaRPr lang="en-US"/>
           </a:p>
@@ -8544,7 +5969,7 @@
           <a:p>
             <a:fld id="{5BCAD085-E8A6-8845-BD4E-CB4CCA059FC4}" type="datetimeFigureOut">
               <a:rPr lang="en-US" smtClean="0"/>
-              <a:t>10/27/2026</a:t>
+              <a:t>10/30/2026</a:t>
             </a:fld>
             <a:endParaRPr lang="en-US"/>
           </a:p>
@@ -11473,7 +8898,7 @@
         </p:nvSpPr>
         <p:spPr>
           <a:xfrm>
-            <a:off x="1005840" y="2377440"/>
+            <a:off x="1005840" y="2163044"/>
             <a:ext cx="10241280" cy="1446550"/>
           </a:xfrm>
           <a:prstGeom prst="rect">
@@ -11493,7 +8918,7 @@
               </a:lnSpc>
             </a:pPr>
             <a:r>
-              <a:rPr lang="pt-BR" sz="4400" b="1" i="0">
+              <a:rPr lang="pt-BR" sz="4400" b="1" i="0" dirty="0">
                 <a:solidFill>
                   <a:srgbClr val="FFFFFF"/>
                 </a:solidFill>
@@ -11501,7 +8926,7 @@
               </a:rPr>
               <a:t>Parte 3 - Além do melhoramento, dentro do agro</a:t>
             </a:r>
-            <a:endParaRPr sz="4400" b="1" i="0">
+            <a:endParaRPr sz="4400" b="1" i="0" dirty="0">
               <a:solidFill>
                 <a:srgbClr val="FFFFFF"/>
               </a:solidFill>
